--- a/docs/10-product/원본-공모전제출/기능설명서_작성본.pptx
+++ b/docs/10-product/원본-공모전제출/기능설명서_작성본.pptx
@@ -12934,11 +12934,11 @@
     </a:clrScheme>
     <a:fontScheme name="Office">
       <a:majorFont>
-        <a:latin typeface="맑은 고딕" panose="020F0302020204030204"/>
+        <a:latin typeface="Gmarket Sans Medium" panose="020F0302020204030204"/>
         <a:ea typeface=""/>
         <a:cs typeface=""/>
         <a:font script="Jpan" typeface="游ゴシック Light"/>
-        <a:font script="Hang" typeface="맑은 고딕"/>
+        <a:font script="Hang" typeface="Gmarket Sans Medium"/>
         <a:font script="Hans" typeface="等线 Light"/>
         <a:font script="Hant" typeface="新細明體"/>
         <a:font script="Arab" typeface="Times New Roman"/>
@@ -12969,11 +12969,11 @@
         <a:font script="Geor" typeface="Sylfaen"/>
       </a:majorFont>
       <a:minorFont>
-        <a:latin typeface="맑은 고딕" panose="020F0502020204030204"/>
+        <a:latin typeface="Gmarket Sans Medium" panose="020F0502020204030204"/>
         <a:ea typeface=""/>
         <a:cs typeface=""/>
         <a:font script="Jpan" typeface="游ゴシック"/>
-        <a:font script="Hang" typeface="맑은 고딕"/>
+        <a:font script="Hang" typeface="Gmarket Sans Medium"/>
         <a:font script="Hans" typeface="等线"/>
         <a:font script="Hant" typeface="新細明體"/>
         <a:font script="Arab" typeface="Arial"/>

--- a/docs/10-product/원본-공모전제출/기능설명서_작성본.pptx
+++ b/docs/10-product/원본-공모전제출/기능설명서_작성본.pptx
@@ -12,6 +12,9 @@
     <p:sldId id="258" r:id="rId3"/>
     <p:sldId id="270" r:id="rId4"/>
     <p:sldId id="267" r:id="rId5"/>
+    <p:sldId id="274" r:id="rId19"/>
+    <p:sldId id="275" r:id="rId20"/>
+    <p:sldId id="276" r:id="rId21"/>
     <p:sldId id="260" r:id="rId6"/>
     <p:sldId id="271" r:id="rId16"/>
     <p:sldId id="272" r:id="rId17"/>
@@ -6078,6 +6081,1770 @@
 </p:sld>
 </file>
 
+<file path=ppt/slides/slide13.xml><?xml version="1.0" encoding="utf-8"?>
+<p:sld xmlns:a="http://schemas.openxmlformats.org/drawingml/2006/main" xmlns:r="http://schemas.openxmlformats.org/officeDocument/2006/relationships" xmlns:p="http://schemas.openxmlformats.org/presentationml/2006/main">
+  <p:cSld>
+    <p:spTree>
+      <p:nvGrpSpPr>
+        <p:cNvPr id="1" name=""/>
+        <p:cNvGrpSpPr/>
+        <p:nvPr/>
+      </p:nvGrpSpPr>
+      <p:grpSpPr>
+        <a:xfrm>
+          <a:off x="0" y="0"/>
+          <a:ext cx="0" cy="0"/>
+          <a:chOff x="0" y="0"/>
+          <a:chExt cx="0" cy="0"/>
+        </a:xfrm>
+      </p:grpSpPr>
+      <p:graphicFrame>
+        <p:nvGraphicFramePr>
+          <p:cNvPr id="9" name="표 8"/>
+          <p:cNvGraphicFramePr>
+            <a:graphicFrameLocks noGrp="1"/>
+          </p:cNvGraphicFramePr>
+          <p:nvPr>
+            <p:extLst>
+              <p:ext uri="{D42A27DB-BD31-4B8C-83A1-F6EECF244321}">
+                <p14:modId xmlns:p14="http://schemas.microsoft.com/office/powerpoint/2010/main" val="1138217558"/>
+              </p:ext>
+            </p:extLst>
+          </p:nvPr>
+        </p:nvGraphicFramePr>
+        <p:xfrm>
+          <a:off x="180961" y="1551963"/>
+          <a:ext cx="11830079" cy="4993748"/>
+        </p:xfrm>
+        <a:graphic>
+          <a:graphicData uri="http://schemas.openxmlformats.org/drawingml/2006/table">
+            <a:tbl>
+              <a:tblPr firstRow="1" bandRow="1">
+                <a:tableStyleId>{5C22544A-7EE6-4342-B048-85BDC9FD1C3A}</a:tableStyleId>
+              </a:tblPr>
+              <a:tblGrid>
+                <a:gridCol w="2570619">
+                  <a:extLst>
+                    <a:ext uri="{9D8B030D-6E8A-4147-A177-3AD203B41FA5}">
+                      <a16:colId xmlns:a16="http://schemas.microsoft.com/office/drawing/2014/main" val="95366056"/>
+                    </a:ext>
+                  </a:extLst>
+                </a:gridCol>
+                <a:gridCol w="2620520">
+                  <a:extLst>
+                    <a:ext uri="{9D8B030D-6E8A-4147-A177-3AD203B41FA5}">
+                      <a16:colId xmlns:a16="http://schemas.microsoft.com/office/drawing/2014/main" val="2325135401"/>
+                    </a:ext>
+                  </a:extLst>
+                </a:gridCol>
+                <a:gridCol w="6638940">
+                  <a:extLst>
+                    <a:ext uri="{9D8B030D-6E8A-4147-A177-3AD203B41FA5}">
+                      <a16:colId xmlns:a16="http://schemas.microsoft.com/office/drawing/2014/main" val="2514411670"/>
+                    </a:ext>
+                  </a:extLst>
+                </a:gridCol>
+              </a:tblGrid>
+              <a:tr h="450256">
+                <a:tc>
+                  <a:txBody>
+                    <a:bodyPr/>
+                    <a:lstStyle/>
+                    <a:p>
+                      <a:pPr marL="0" marR="0" lvl="0" indent="0" algn="ctr" defTabSz="914400" rtl="0" eaLnBrk="1" fontAlgn="auto" latinLnBrk="1" hangingPunct="1">
+                        <a:lnSpc>
+                          <a:spcPct val="100000"/>
+                        </a:lnSpc>
+                        <a:spcBef>
+                          <a:spcPts val="0"/>
+                        </a:spcBef>
+                        <a:spcAft>
+                          <a:spcPts val="0"/>
+                        </a:spcAft>
+                        <a:buClrTx/>
+                        <a:buSzTx/>
+                        <a:buFontTx/>
+                        <a:buNone/>
+                        <a:tabLst/>
+                        <a:defRPr/>
+                      </a:pPr>
+                      <a:r>
+                        <a:rPr lang="ko-KR" altLang="en-US" sz="1600" b="1" smtClean="0">
+                          <a:solidFill>
+                            <a:schemeClr val="bg1"/>
+                          </a:solidFill>
+                        </a:rPr>
+                        <a:t>해시태그</a:t>
+                      </a:r>
+                    </a:p>
+                  </a:txBody>
+                  <a:tcPr anchor="ctr">
+                    <a:lnL w="12700" cap="flat" cmpd="sng" algn="ctr">
+                      <a:solidFill>
+                        <a:schemeClr val="bg1">
+                          <a:lumMod val="85000"/>
+                        </a:schemeClr>
+                      </a:solidFill>
+                      <a:prstDash val="solid"/>
+                      <a:round/>
+                      <a:headEnd type="none" w="med" len="med"/>
+                      <a:tailEnd type="none" w="med" len="med"/>
+                    </a:lnL>
+                    <a:lnR w="12700" cap="flat" cmpd="sng" algn="ctr">
+                      <a:solidFill>
+                        <a:schemeClr val="bg1">
+                          <a:lumMod val="85000"/>
+                        </a:schemeClr>
+                      </a:solidFill>
+                      <a:prstDash val="solid"/>
+                      <a:round/>
+                      <a:headEnd type="none" w="med" len="med"/>
+                      <a:tailEnd type="none" w="med" len="med"/>
+                    </a:lnR>
+                    <a:lnT w="12700" cap="flat" cmpd="sng" algn="ctr">
+                      <a:solidFill>
+                        <a:schemeClr val="bg1">
+                          <a:lumMod val="85000"/>
+                        </a:schemeClr>
+                      </a:solidFill>
+                      <a:prstDash val="solid"/>
+                      <a:round/>
+                      <a:headEnd type="none" w="med" len="med"/>
+                      <a:tailEnd type="none" w="med" len="med"/>
+                    </a:lnT>
+                    <a:lnB w="12700" cap="flat" cmpd="sng" algn="ctr">
+                      <a:solidFill>
+                        <a:schemeClr val="bg1">
+                          <a:lumMod val="85000"/>
+                        </a:schemeClr>
+                      </a:solidFill>
+                      <a:prstDash val="solid"/>
+                      <a:round/>
+                      <a:headEnd type="none" w="med" len="med"/>
+                      <a:tailEnd type="none" w="med" len="med"/>
+                    </a:lnB>
+                    <a:solidFill>
+                      <a:srgbClr val="499DBF"/>
+                    </a:solidFill>
+                  </a:tcPr>
+                </a:tc>
+                <a:tc>
+                  <a:txBody>
+                    <a:bodyPr/>
+                    <a:lstStyle/>
+                    <a:p>
+                      <a:pPr marL="0" marR="0" lvl="0" indent="0" algn="ctr" defTabSz="914400" rtl="0" eaLnBrk="1" fontAlgn="auto" latinLnBrk="1" hangingPunct="1">
+                        <a:lnSpc>
+                          <a:spcPct val="100000"/>
+                        </a:lnSpc>
+                        <a:spcBef>
+                          <a:spcPts val="0"/>
+                        </a:spcBef>
+                        <a:spcAft>
+                          <a:spcPts val="0"/>
+                        </a:spcAft>
+                        <a:buClrTx/>
+                        <a:buSzTx/>
+                        <a:buFontTx/>
+                        <a:buNone/>
+                        <a:tabLst/>
+                        <a:defRPr/>
+                      </a:pPr>
+                      <a:r>
+                        <a:rPr lang="ko-KR" altLang="en-US" sz="1600" b="1" smtClean="0">
+                          <a:solidFill>
+                            <a:schemeClr val="bg1"/>
+                          </a:solidFill>
+                        </a:rPr>
+                        <a:t>연계 기능</a:t>
+                      </a:r>
+                      <a:endParaRPr lang="ko-KR" altLang="en-US" sz="1600" b="1">
+                        <a:solidFill>
+                          <a:schemeClr val="bg1"/>
+                        </a:solidFill>
+                      </a:endParaRPr>
+                    </a:p>
+                  </a:txBody>
+                  <a:tcPr anchor="ctr">
+                    <a:lnL w="12700" cap="flat" cmpd="sng" algn="ctr">
+                      <a:solidFill>
+                        <a:schemeClr val="bg1">
+                          <a:lumMod val="85000"/>
+                        </a:schemeClr>
+                      </a:solidFill>
+                      <a:prstDash val="solid"/>
+                      <a:round/>
+                      <a:headEnd type="none" w="med" len="med"/>
+                      <a:tailEnd type="none" w="med" len="med"/>
+                    </a:lnL>
+                    <a:lnR w="12700" cap="flat" cmpd="sng" algn="ctr">
+                      <a:solidFill>
+                        <a:schemeClr val="bg1">
+                          <a:lumMod val="85000"/>
+                        </a:schemeClr>
+                      </a:solidFill>
+                      <a:prstDash val="solid"/>
+                      <a:round/>
+                      <a:headEnd type="none" w="med" len="med"/>
+                      <a:tailEnd type="none" w="med" len="med"/>
+                    </a:lnR>
+                    <a:lnT w="12700" cap="flat" cmpd="sng" algn="ctr">
+                      <a:solidFill>
+                        <a:schemeClr val="bg1">
+                          <a:lumMod val="85000"/>
+                        </a:schemeClr>
+                      </a:solidFill>
+                      <a:prstDash val="solid"/>
+                      <a:round/>
+                      <a:headEnd type="none" w="med" len="med"/>
+                      <a:tailEnd type="none" w="med" len="med"/>
+                    </a:lnT>
+                    <a:lnB w="12700" cap="flat" cmpd="sng" algn="ctr">
+                      <a:solidFill>
+                        <a:schemeClr val="bg1">
+                          <a:lumMod val="85000"/>
+                        </a:schemeClr>
+                      </a:solidFill>
+                      <a:prstDash val="solid"/>
+                      <a:round/>
+                      <a:headEnd type="none" w="med" len="med"/>
+                      <a:tailEnd type="none" w="med" len="med"/>
+                    </a:lnB>
+                    <a:solidFill>
+                      <a:srgbClr val="499DBF"/>
+                    </a:solidFill>
+                  </a:tcPr>
+                </a:tc>
+                <a:tc>
+                  <a:txBody>
+                    <a:bodyPr/>
+                    <a:lstStyle/>
+                    <a:p>
+                      <a:pPr marL="0" marR="0" lvl="0" indent="0" algn="ctr" defTabSz="914400" rtl="0" eaLnBrk="1" fontAlgn="auto" latinLnBrk="1" hangingPunct="1">
+                        <a:lnSpc>
+                          <a:spcPct val="100000"/>
+                        </a:lnSpc>
+                        <a:spcBef>
+                          <a:spcPts val="0"/>
+                        </a:spcBef>
+                        <a:spcAft>
+                          <a:spcPts val="0"/>
+                        </a:spcAft>
+                        <a:buClrTx/>
+                        <a:buSzTx/>
+                        <a:buFontTx/>
+                        <a:buNone/>
+                        <a:tabLst/>
+                        <a:defRPr/>
+                      </a:pPr>
+                      <a:r>
+                        <a:rPr lang="ko-KR" altLang="en-US" sz="1600" b="1" baseline="0" smtClean="0">
+                          <a:solidFill>
+                            <a:schemeClr val="bg1"/>
+                          </a:solidFill>
+                        </a:rPr>
+                        <a:t>연계 상세 내용</a:t>
+                      </a:r>
+                      <a:endParaRPr lang="ko-KR" altLang="en-US" sz="1600" b="1">
+                        <a:solidFill>
+                          <a:schemeClr val="bg1"/>
+                        </a:solidFill>
+                      </a:endParaRPr>
+                    </a:p>
+                  </a:txBody>
+                  <a:tcPr anchor="ctr">
+                    <a:lnL w="12700" cap="flat" cmpd="sng" algn="ctr">
+                      <a:solidFill>
+                        <a:schemeClr val="bg1">
+                          <a:lumMod val="85000"/>
+                        </a:schemeClr>
+                      </a:solidFill>
+                      <a:prstDash val="solid"/>
+                      <a:round/>
+                      <a:headEnd type="none" w="med" len="med"/>
+                      <a:tailEnd type="none" w="med" len="med"/>
+                    </a:lnL>
+                    <a:lnR w="12700" cap="flat" cmpd="sng" algn="ctr">
+                      <a:solidFill>
+                        <a:schemeClr val="bg1">
+                          <a:lumMod val="85000"/>
+                        </a:schemeClr>
+                      </a:solidFill>
+                      <a:prstDash val="solid"/>
+                      <a:round/>
+                      <a:headEnd type="none" w="med" len="med"/>
+                      <a:tailEnd type="none" w="med" len="med"/>
+                    </a:lnR>
+                    <a:lnT w="12700" cap="flat" cmpd="sng" algn="ctr">
+                      <a:solidFill>
+                        <a:schemeClr val="bg1">
+                          <a:lumMod val="85000"/>
+                        </a:schemeClr>
+                      </a:solidFill>
+                      <a:prstDash val="solid"/>
+                      <a:round/>
+                      <a:headEnd type="none" w="med" len="med"/>
+                      <a:tailEnd type="none" w="med" len="med"/>
+                    </a:lnT>
+                    <a:lnB w="12700" cap="flat" cmpd="sng" algn="ctr">
+                      <a:solidFill>
+                        <a:schemeClr val="bg1">
+                          <a:lumMod val="85000"/>
+                        </a:schemeClr>
+                      </a:solidFill>
+                      <a:prstDash val="solid"/>
+                      <a:round/>
+                      <a:headEnd type="none" w="med" len="med"/>
+                      <a:tailEnd type="none" w="med" len="med"/>
+                    </a:lnB>
+                    <a:solidFill>
+                      <a:srgbClr val="499DBF"/>
+                    </a:solidFill>
+                  </a:tcPr>
+                </a:tc>
+                <a:extLst>
+                  <a:ext uri="{0D108BD9-81ED-4DB2-BD59-A6C34878D82A}">
+                    <a16:rowId xmlns:a16="http://schemas.microsoft.com/office/drawing/2014/main" val="3357600838"/>
+                  </a:ext>
+                </a:extLst>
+              </a:tr>
+              <a:tr h="4543492">
+                <a:tc>
+                  <a:txBody>
+                    <a:bodyPr/>
+                    <a:lstStyle/>
+                    <a:p>
+                      <a:r>
+                        <a:rPr lang="ko-KR" altLang="en-US" sz="1400" b="0">
+                          <a:solidFill>
+                            <a:schemeClr val="tx1"/>
+                          </a:solidFill>
+                        </a:rPr>
+                        <a:t>#쉼표순례길</a:t>
+                      </a:r>
+                    </a:p>
+                  </a:txBody>
+                  <a:tcPr anchor="ctr">
+                    <a:lnL w="12700" cap="flat" cmpd="sng" algn="ctr">
+                      <a:solidFill>
+                        <a:schemeClr val="bg1">
+                          <a:lumMod val="85000"/>
+                        </a:schemeClr>
+                      </a:solidFill>
+                      <a:prstDash val="solid"/>
+                      <a:round/>
+                      <a:headEnd type="none" w="med" len="med"/>
+                      <a:tailEnd type="none" w="med" len="med"/>
+                    </a:lnL>
+                    <a:lnR w="12700" cap="flat" cmpd="sng" algn="ctr">
+                      <a:solidFill>
+                        <a:schemeClr val="bg1">
+                          <a:lumMod val="85000"/>
+                        </a:schemeClr>
+                      </a:solidFill>
+                      <a:prstDash val="solid"/>
+                      <a:round/>
+                      <a:headEnd type="none" w="med" len="med"/>
+                      <a:tailEnd type="none" w="med" len="med"/>
+                    </a:lnR>
+                    <a:lnT w="12700" cap="flat" cmpd="sng" algn="ctr">
+                      <a:solidFill>
+                        <a:schemeClr val="bg1">
+                          <a:lumMod val="85000"/>
+                        </a:schemeClr>
+                      </a:solidFill>
+                      <a:prstDash val="solid"/>
+                      <a:round/>
+                      <a:headEnd type="none" w="med" len="med"/>
+                      <a:tailEnd type="none" w="med" len="med"/>
+                    </a:lnT>
+                    <a:lnB w="12700" cap="flat" cmpd="sng" algn="ctr">
+                      <a:solidFill>
+                        <a:schemeClr val="bg1">
+                          <a:lumMod val="85000"/>
+                        </a:schemeClr>
+                      </a:solidFill>
+                      <a:prstDash val="solid"/>
+                      <a:round/>
+                      <a:headEnd type="none" w="med" len="med"/>
+                      <a:tailEnd type="none" w="med" len="med"/>
+                    </a:lnB>
+                    <a:noFill/>
+                  </a:tcPr>
+                </a:tc>
+                <a:tc>
+                  <a:txBody>
+                    <a:bodyPr/>
+                    <a:lstStyle/>
+                    <a:p>
+                      <a:r>
+                        <a:rPr lang="ko-KR" altLang="en-US" sz="1400" b="0">
+                          <a:solidFill>
+                            <a:schemeClr val="tx1"/>
+                          </a:solidFill>
+                        </a:rPr>
+                        <a:t>감정 기반 코스 매칭</a:t>
+                      </a:r>
+                    </a:p>
+                  </a:txBody>
+                  <a:tcPr anchor="ctr">
+                    <a:lnL w="12700" cap="flat" cmpd="sng" algn="ctr">
+                      <a:solidFill>
+                        <a:schemeClr val="bg1">
+                          <a:lumMod val="85000"/>
+                        </a:schemeClr>
+                      </a:solidFill>
+                      <a:prstDash val="solid"/>
+                      <a:round/>
+                      <a:headEnd type="none" w="med" len="med"/>
+                      <a:tailEnd type="none" w="med" len="med"/>
+                    </a:lnL>
+                    <a:lnR w="12700" cap="flat" cmpd="sng" algn="ctr">
+                      <a:solidFill>
+                        <a:schemeClr val="bg1">
+                          <a:lumMod val="85000"/>
+                        </a:schemeClr>
+                      </a:solidFill>
+                      <a:prstDash val="solid"/>
+                      <a:round/>
+                      <a:headEnd type="none" w="med" len="med"/>
+                      <a:tailEnd type="none" w="med" len="med"/>
+                    </a:lnR>
+                    <a:lnT w="12700" cap="flat" cmpd="sng" algn="ctr">
+                      <a:solidFill>
+                        <a:schemeClr val="bg1">
+                          <a:lumMod val="85000"/>
+                        </a:schemeClr>
+                      </a:solidFill>
+                      <a:prstDash val="solid"/>
+                      <a:round/>
+                      <a:headEnd type="none" w="med" len="med"/>
+                      <a:tailEnd type="none" w="med" len="med"/>
+                    </a:lnT>
+                    <a:lnB w="12700" cap="flat" cmpd="sng" algn="ctr">
+                      <a:solidFill>
+                        <a:schemeClr val="bg1">
+                          <a:lumMod val="85000"/>
+                        </a:schemeClr>
+                      </a:solidFill>
+                      <a:prstDash val="solid"/>
+                      <a:round/>
+                      <a:headEnd type="none" w="med" len="med"/>
+                      <a:tailEnd type="none" w="med" len="med"/>
+                    </a:lnB>
+                    <a:noFill/>
+                  </a:tcPr>
+                </a:tc>
+                <a:tc>
+                  <a:txBody>
+                    <a:bodyPr/>
+                    <a:lstStyle/>
+                    <a:p>
+                      <a:r>
+                        <a:rPr lang="ko-KR" altLang="en-US" sz="1400" b="0">
+                          <a:solidFill>
+                            <a:schemeClr val="tx1"/>
+                          </a:solidFill>
+                        </a:rPr>
+                        <a:t>위로/새출발/평온/치유/감사 5개 감정 중 하나를 고르면 해당 감정의 성지 후보를 조회하고, 좌표가 있는 성지는 TourAPI 반경 검색으로 도보권 관광지를 실시간 페어링해 '성지+관광지' 코스 카드로 제공한다.</a:t>
+                      </a:r>
+                    </a:p>
+                  </a:txBody>
+                  <a:tcPr anchor="ctr">
+                    <a:lnL w="12700" cap="flat" cmpd="sng" algn="ctr">
+                      <a:solidFill>
+                        <a:schemeClr val="bg1">
+                          <a:lumMod val="85000"/>
+                        </a:schemeClr>
+                      </a:solidFill>
+                      <a:prstDash val="solid"/>
+                      <a:round/>
+                      <a:headEnd type="none" w="med" len="med"/>
+                      <a:tailEnd type="none" w="med" len="med"/>
+                    </a:lnL>
+                    <a:lnR w="12700" cap="flat" cmpd="sng" algn="ctr">
+                      <a:solidFill>
+                        <a:schemeClr val="bg1">
+                          <a:lumMod val="85000"/>
+                        </a:schemeClr>
+                      </a:solidFill>
+                      <a:prstDash val="solid"/>
+                      <a:round/>
+                      <a:headEnd type="none" w="med" len="med"/>
+                      <a:tailEnd type="none" w="med" len="med"/>
+                    </a:lnR>
+                    <a:lnT w="12700" cap="flat" cmpd="sng" algn="ctr">
+                      <a:solidFill>
+                        <a:schemeClr val="bg1">
+                          <a:lumMod val="85000"/>
+                        </a:schemeClr>
+                      </a:solidFill>
+                      <a:prstDash val="solid"/>
+                      <a:round/>
+                      <a:headEnd type="none" w="med" len="med"/>
+                      <a:tailEnd type="none" w="med" len="med"/>
+                    </a:lnT>
+                    <a:lnB w="12700" cap="flat" cmpd="sng" algn="ctr">
+                      <a:solidFill>
+                        <a:schemeClr val="bg1">
+                          <a:lumMod val="85000"/>
+                        </a:schemeClr>
+                      </a:solidFill>
+                      <a:prstDash val="solid"/>
+                      <a:round/>
+                      <a:headEnd type="none" w="med" len="med"/>
+                      <a:tailEnd type="none" w="med" len="med"/>
+                    </a:lnB>
+                    <a:noFill/>
+                  </a:tcPr>
+                </a:tc>
+                <a:extLst>
+                  <a:ext uri="{0D108BD9-81ED-4DB2-BD59-A6C34878D82A}">
+                    <a16:rowId xmlns:a16="http://schemas.microsoft.com/office/drawing/2014/main" val="4293083417"/>
+                  </a:ext>
+                </a:extLst>
+              </a:tr>
+            </a:tbl>
+          </a:graphicData>
+        </a:graphic>
+      </p:graphicFrame>
+      <p:sp>
+        <p:nvSpPr>
+          <p:cNvPr id="4" name="TextBox 3"/>
+          <p:cNvSpPr txBox="1"/>
+          <p:nvPr/>
+        </p:nvSpPr>
+        <p:spPr>
+          <a:xfrm>
+            <a:off x="174567" y="1101012"/>
+            <a:ext cx="3382365" cy="307777"/>
+          </a:xfrm>
+          <a:prstGeom prst="rect">
+            <a:avLst/>
+          </a:prstGeom>
+          <a:solidFill>
+            <a:srgbClr val="372472"/>
+          </a:solidFill>
+        </p:spPr>
+        <p:txBody>
+          <a:bodyPr wrap="square" rtlCol="0">
+            <a:spAutoFit/>
+          </a:bodyPr>
+          <a:lstStyle/>
+          <a:p>
+            <a:pPr algn="ctr"/>
+            <a:r>
+              <a:rPr lang="ko-KR" altLang="en-US" sz="1400" b="1" dirty="0" smtClean="0">
+                <a:solidFill>
+                  <a:schemeClr val="bg1"/>
+                </a:solidFill>
+              </a:rPr>
+              <a:t>해시태그 연계 핵심기능 및 상세내용</a:t>
+            </a:r>
+            <a:endParaRPr lang="ko-KR" altLang="en-US" sz="1400" b="1" dirty="0">
+              <a:solidFill>
+                <a:schemeClr val="bg1"/>
+              </a:solidFill>
+            </a:endParaRPr>
+          </a:p>
+        </p:txBody>
+      </p:sp>
+    </p:spTree>
+    <p:extLst>
+      <p:ext uri="{BB962C8B-B14F-4D97-AF65-F5344CB8AC3E}">
+        <p14:creationId xmlns:p14="http://schemas.microsoft.com/office/powerpoint/2010/main" val="4098688186"/>
+      </p:ext>
+    </p:extLst>
+  </p:cSld>
+  <p:clrMapOvr>
+    <a:masterClrMapping/>
+  </p:clrMapOvr>
+  <p:timing>
+    <p:tnLst>
+      <p:par>
+        <p:cTn id="1" dur="indefinite" restart="never" nodeType="tmRoot"/>
+      </p:par>
+    </p:tnLst>
+  </p:timing>
+</p:sld>
+</file>
+
+<file path=ppt/slides/slide14.xml><?xml version="1.0" encoding="utf-8"?>
+<p:sld xmlns:a="http://schemas.openxmlformats.org/drawingml/2006/main" xmlns:r="http://schemas.openxmlformats.org/officeDocument/2006/relationships" xmlns:p="http://schemas.openxmlformats.org/presentationml/2006/main">
+  <p:cSld>
+    <p:spTree>
+      <p:nvGrpSpPr>
+        <p:cNvPr id="1" name=""/>
+        <p:cNvGrpSpPr/>
+        <p:nvPr/>
+      </p:nvGrpSpPr>
+      <p:grpSpPr>
+        <a:xfrm>
+          <a:off x="0" y="0"/>
+          <a:ext cx="0" cy="0"/>
+          <a:chOff x="0" y="0"/>
+          <a:chExt cx="0" cy="0"/>
+        </a:xfrm>
+      </p:grpSpPr>
+      <p:graphicFrame>
+        <p:nvGraphicFramePr>
+          <p:cNvPr id="9" name="표 8"/>
+          <p:cNvGraphicFramePr>
+            <a:graphicFrameLocks noGrp="1"/>
+          </p:cNvGraphicFramePr>
+          <p:nvPr>
+            <p:extLst>
+              <p:ext uri="{D42A27DB-BD31-4B8C-83A1-F6EECF244321}">
+                <p14:modId xmlns:p14="http://schemas.microsoft.com/office/powerpoint/2010/main" val="1138217558"/>
+              </p:ext>
+            </p:extLst>
+          </p:nvPr>
+        </p:nvGraphicFramePr>
+        <p:xfrm>
+          <a:off x="180961" y="1551963"/>
+          <a:ext cx="11830079" cy="4993748"/>
+        </p:xfrm>
+        <a:graphic>
+          <a:graphicData uri="http://schemas.openxmlformats.org/drawingml/2006/table">
+            <a:tbl>
+              <a:tblPr firstRow="1" bandRow="1">
+                <a:tableStyleId>{5C22544A-7EE6-4342-B048-85BDC9FD1C3A}</a:tableStyleId>
+              </a:tblPr>
+              <a:tblGrid>
+                <a:gridCol w="2570619">
+                  <a:extLst>
+                    <a:ext uri="{9D8B030D-6E8A-4147-A177-3AD203B41FA5}">
+                      <a16:colId xmlns:a16="http://schemas.microsoft.com/office/drawing/2014/main" val="95366056"/>
+                    </a:ext>
+                  </a:extLst>
+                </a:gridCol>
+                <a:gridCol w="2620520">
+                  <a:extLst>
+                    <a:ext uri="{9D8B030D-6E8A-4147-A177-3AD203B41FA5}">
+                      <a16:colId xmlns:a16="http://schemas.microsoft.com/office/drawing/2014/main" val="2325135401"/>
+                    </a:ext>
+                  </a:extLst>
+                </a:gridCol>
+                <a:gridCol w="6638940">
+                  <a:extLst>
+                    <a:ext uri="{9D8B030D-6E8A-4147-A177-3AD203B41FA5}">
+                      <a16:colId xmlns:a16="http://schemas.microsoft.com/office/drawing/2014/main" val="2514411670"/>
+                    </a:ext>
+                  </a:extLst>
+                </a:gridCol>
+              </a:tblGrid>
+              <a:tr h="450256">
+                <a:tc>
+                  <a:txBody>
+                    <a:bodyPr/>
+                    <a:lstStyle/>
+                    <a:p>
+                      <a:pPr marL="0" marR="0" lvl="0" indent="0" algn="ctr" defTabSz="914400" rtl="0" eaLnBrk="1" fontAlgn="auto" latinLnBrk="1" hangingPunct="1">
+                        <a:lnSpc>
+                          <a:spcPct val="100000"/>
+                        </a:lnSpc>
+                        <a:spcBef>
+                          <a:spcPts val="0"/>
+                        </a:spcBef>
+                        <a:spcAft>
+                          <a:spcPts val="0"/>
+                        </a:spcAft>
+                        <a:buClrTx/>
+                        <a:buSzTx/>
+                        <a:buFontTx/>
+                        <a:buNone/>
+                        <a:tabLst/>
+                        <a:defRPr/>
+                      </a:pPr>
+                      <a:r>
+                        <a:rPr lang="ko-KR" altLang="en-US" sz="1600" b="1" smtClean="0">
+                          <a:solidFill>
+                            <a:schemeClr val="bg1"/>
+                          </a:solidFill>
+                        </a:rPr>
+                        <a:t>해시태그</a:t>
+                      </a:r>
+                    </a:p>
+                  </a:txBody>
+                  <a:tcPr anchor="ctr">
+                    <a:lnL w="12700" cap="flat" cmpd="sng" algn="ctr">
+                      <a:solidFill>
+                        <a:schemeClr val="bg1">
+                          <a:lumMod val="85000"/>
+                        </a:schemeClr>
+                      </a:solidFill>
+                      <a:prstDash val="solid"/>
+                      <a:round/>
+                      <a:headEnd type="none" w="med" len="med"/>
+                      <a:tailEnd type="none" w="med" len="med"/>
+                    </a:lnL>
+                    <a:lnR w="12700" cap="flat" cmpd="sng" algn="ctr">
+                      <a:solidFill>
+                        <a:schemeClr val="bg1">
+                          <a:lumMod val="85000"/>
+                        </a:schemeClr>
+                      </a:solidFill>
+                      <a:prstDash val="solid"/>
+                      <a:round/>
+                      <a:headEnd type="none" w="med" len="med"/>
+                      <a:tailEnd type="none" w="med" len="med"/>
+                    </a:lnR>
+                    <a:lnT w="12700" cap="flat" cmpd="sng" algn="ctr">
+                      <a:solidFill>
+                        <a:schemeClr val="bg1">
+                          <a:lumMod val="85000"/>
+                        </a:schemeClr>
+                      </a:solidFill>
+                      <a:prstDash val="solid"/>
+                      <a:round/>
+                      <a:headEnd type="none" w="med" len="med"/>
+                      <a:tailEnd type="none" w="med" len="med"/>
+                    </a:lnT>
+                    <a:lnB w="12700" cap="flat" cmpd="sng" algn="ctr">
+                      <a:solidFill>
+                        <a:schemeClr val="bg1">
+                          <a:lumMod val="85000"/>
+                        </a:schemeClr>
+                      </a:solidFill>
+                      <a:prstDash val="solid"/>
+                      <a:round/>
+                      <a:headEnd type="none" w="med" len="med"/>
+                      <a:tailEnd type="none" w="med" len="med"/>
+                    </a:lnB>
+                    <a:solidFill>
+                      <a:srgbClr val="499DBF"/>
+                    </a:solidFill>
+                  </a:tcPr>
+                </a:tc>
+                <a:tc>
+                  <a:txBody>
+                    <a:bodyPr/>
+                    <a:lstStyle/>
+                    <a:p>
+                      <a:pPr marL="0" marR="0" lvl="0" indent="0" algn="ctr" defTabSz="914400" rtl="0" eaLnBrk="1" fontAlgn="auto" latinLnBrk="1" hangingPunct="1">
+                        <a:lnSpc>
+                          <a:spcPct val="100000"/>
+                        </a:lnSpc>
+                        <a:spcBef>
+                          <a:spcPts val="0"/>
+                        </a:spcBef>
+                        <a:spcAft>
+                          <a:spcPts val="0"/>
+                        </a:spcAft>
+                        <a:buClrTx/>
+                        <a:buSzTx/>
+                        <a:buFontTx/>
+                        <a:buNone/>
+                        <a:tabLst/>
+                        <a:defRPr/>
+                      </a:pPr>
+                      <a:r>
+                        <a:rPr lang="ko-KR" altLang="en-US" sz="1600" b="1" smtClean="0">
+                          <a:solidFill>
+                            <a:schemeClr val="bg1"/>
+                          </a:solidFill>
+                        </a:rPr>
+                        <a:t>연계 기능</a:t>
+                      </a:r>
+                      <a:endParaRPr lang="ko-KR" altLang="en-US" sz="1600" b="1">
+                        <a:solidFill>
+                          <a:schemeClr val="bg1"/>
+                        </a:solidFill>
+                      </a:endParaRPr>
+                    </a:p>
+                  </a:txBody>
+                  <a:tcPr anchor="ctr">
+                    <a:lnL w="12700" cap="flat" cmpd="sng" algn="ctr">
+                      <a:solidFill>
+                        <a:schemeClr val="bg1">
+                          <a:lumMod val="85000"/>
+                        </a:schemeClr>
+                      </a:solidFill>
+                      <a:prstDash val="solid"/>
+                      <a:round/>
+                      <a:headEnd type="none" w="med" len="med"/>
+                      <a:tailEnd type="none" w="med" len="med"/>
+                    </a:lnL>
+                    <a:lnR w="12700" cap="flat" cmpd="sng" algn="ctr">
+                      <a:solidFill>
+                        <a:schemeClr val="bg1">
+                          <a:lumMod val="85000"/>
+                        </a:schemeClr>
+                      </a:solidFill>
+                      <a:prstDash val="solid"/>
+                      <a:round/>
+                      <a:headEnd type="none" w="med" len="med"/>
+                      <a:tailEnd type="none" w="med" len="med"/>
+                    </a:lnR>
+                    <a:lnT w="12700" cap="flat" cmpd="sng" algn="ctr">
+                      <a:solidFill>
+                        <a:schemeClr val="bg1">
+                          <a:lumMod val="85000"/>
+                        </a:schemeClr>
+                      </a:solidFill>
+                      <a:prstDash val="solid"/>
+                      <a:round/>
+                      <a:headEnd type="none" w="med" len="med"/>
+                      <a:tailEnd type="none" w="med" len="med"/>
+                    </a:lnT>
+                    <a:lnB w="12700" cap="flat" cmpd="sng" algn="ctr">
+                      <a:solidFill>
+                        <a:schemeClr val="bg1">
+                          <a:lumMod val="85000"/>
+                        </a:schemeClr>
+                      </a:solidFill>
+                      <a:prstDash val="solid"/>
+                      <a:round/>
+                      <a:headEnd type="none" w="med" len="med"/>
+                      <a:tailEnd type="none" w="med" len="med"/>
+                    </a:lnB>
+                    <a:solidFill>
+                      <a:srgbClr val="499DBF"/>
+                    </a:solidFill>
+                  </a:tcPr>
+                </a:tc>
+                <a:tc>
+                  <a:txBody>
+                    <a:bodyPr/>
+                    <a:lstStyle/>
+                    <a:p>
+                      <a:pPr marL="0" marR="0" lvl="0" indent="0" algn="ctr" defTabSz="914400" rtl="0" eaLnBrk="1" fontAlgn="auto" latinLnBrk="1" hangingPunct="1">
+                        <a:lnSpc>
+                          <a:spcPct val="100000"/>
+                        </a:lnSpc>
+                        <a:spcBef>
+                          <a:spcPts val="0"/>
+                        </a:spcBef>
+                        <a:spcAft>
+                          <a:spcPts val="0"/>
+                        </a:spcAft>
+                        <a:buClrTx/>
+                        <a:buSzTx/>
+                        <a:buFontTx/>
+                        <a:buNone/>
+                        <a:tabLst/>
+                        <a:defRPr/>
+                      </a:pPr>
+                      <a:r>
+                        <a:rPr lang="ko-KR" altLang="en-US" sz="1600" b="1" baseline="0" smtClean="0">
+                          <a:solidFill>
+                            <a:schemeClr val="bg1"/>
+                          </a:solidFill>
+                        </a:rPr>
+                        <a:t>연계 상세 내용</a:t>
+                      </a:r>
+                      <a:endParaRPr lang="ko-KR" altLang="en-US" sz="1600" b="1">
+                        <a:solidFill>
+                          <a:schemeClr val="bg1"/>
+                        </a:solidFill>
+                      </a:endParaRPr>
+                    </a:p>
+                  </a:txBody>
+                  <a:tcPr anchor="ctr">
+                    <a:lnL w="12700" cap="flat" cmpd="sng" algn="ctr">
+                      <a:solidFill>
+                        <a:schemeClr val="bg1">
+                          <a:lumMod val="85000"/>
+                        </a:schemeClr>
+                      </a:solidFill>
+                      <a:prstDash val="solid"/>
+                      <a:round/>
+                      <a:headEnd type="none" w="med" len="med"/>
+                      <a:tailEnd type="none" w="med" len="med"/>
+                    </a:lnL>
+                    <a:lnR w="12700" cap="flat" cmpd="sng" algn="ctr">
+                      <a:solidFill>
+                        <a:schemeClr val="bg1">
+                          <a:lumMod val="85000"/>
+                        </a:schemeClr>
+                      </a:solidFill>
+                      <a:prstDash val="solid"/>
+                      <a:round/>
+                      <a:headEnd type="none" w="med" len="med"/>
+                      <a:tailEnd type="none" w="med" len="med"/>
+                    </a:lnR>
+                    <a:lnT w="12700" cap="flat" cmpd="sng" algn="ctr">
+                      <a:solidFill>
+                        <a:schemeClr val="bg1">
+                          <a:lumMod val="85000"/>
+                        </a:schemeClr>
+                      </a:solidFill>
+                      <a:prstDash val="solid"/>
+                      <a:round/>
+                      <a:headEnd type="none" w="med" len="med"/>
+                      <a:tailEnd type="none" w="med" len="med"/>
+                    </a:lnT>
+                    <a:lnB w="12700" cap="flat" cmpd="sng" algn="ctr">
+                      <a:solidFill>
+                        <a:schemeClr val="bg1">
+                          <a:lumMod val="85000"/>
+                        </a:schemeClr>
+                      </a:solidFill>
+                      <a:prstDash val="solid"/>
+                      <a:round/>
+                      <a:headEnd type="none" w="med" len="med"/>
+                      <a:tailEnd type="none" w="med" len="med"/>
+                    </a:lnB>
+                    <a:solidFill>
+                      <a:srgbClr val="499DBF"/>
+                    </a:solidFill>
+                  </a:tcPr>
+                </a:tc>
+                <a:extLst>
+                  <a:ext uri="{0D108BD9-81ED-4DB2-BD59-A6C34878D82A}">
+                    <a16:rowId xmlns:a16="http://schemas.microsoft.com/office/drawing/2014/main" val="3357600838"/>
+                  </a:ext>
+                </a:extLst>
+              </a:tr>
+              <a:tr h="4543492">
+                <a:tc>
+                  <a:txBody>
+                    <a:bodyPr/>
+                    <a:lstStyle/>
+                    <a:p>
+                      <a:r>
+                        <a:rPr lang="ko-KR" altLang="en-US" sz="1400" b="0">
+                          <a:solidFill>
+                            <a:schemeClr val="tx1"/>
+                          </a:solidFill>
+                        </a:rPr>
+                        <a:t>#마음나침반</a:t>
+                      </a:r>
+                    </a:p>
+                  </a:txBody>
+                  <a:tcPr anchor="ctr">
+                    <a:lnL w="12700" cap="flat" cmpd="sng" algn="ctr">
+                      <a:solidFill>
+                        <a:schemeClr val="bg1">
+                          <a:lumMod val="85000"/>
+                        </a:schemeClr>
+                      </a:solidFill>
+                      <a:prstDash val="solid"/>
+                      <a:round/>
+                      <a:headEnd type="none" w="med" len="med"/>
+                      <a:tailEnd type="none" w="med" len="med"/>
+                    </a:lnL>
+                    <a:lnR w="12700" cap="flat" cmpd="sng" algn="ctr">
+                      <a:solidFill>
+                        <a:schemeClr val="bg1">
+                          <a:lumMod val="85000"/>
+                        </a:schemeClr>
+                      </a:solidFill>
+                      <a:prstDash val="solid"/>
+                      <a:round/>
+                      <a:headEnd type="none" w="med" len="med"/>
+                      <a:tailEnd type="none" w="med" len="med"/>
+                    </a:lnR>
+                    <a:lnT w="12700" cap="flat" cmpd="sng" algn="ctr">
+                      <a:solidFill>
+                        <a:schemeClr val="bg1">
+                          <a:lumMod val="85000"/>
+                        </a:schemeClr>
+                      </a:solidFill>
+                      <a:prstDash val="solid"/>
+                      <a:round/>
+                      <a:headEnd type="none" w="med" len="med"/>
+                      <a:tailEnd type="none" w="med" len="med"/>
+                    </a:lnT>
+                    <a:lnB w="12700" cap="flat" cmpd="sng" algn="ctr">
+                      <a:solidFill>
+                        <a:schemeClr val="bg1">
+                          <a:lumMod val="85000"/>
+                        </a:schemeClr>
+                      </a:solidFill>
+                      <a:prstDash val="solid"/>
+                      <a:round/>
+                      <a:headEnd type="none" w="med" len="med"/>
+                      <a:tailEnd type="none" w="med" len="med"/>
+                    </a:lnB>
+                    <a:noFill/>
+                  </a:tcPr>
+                </a:tc>
+                <a:tc>
+                  <a:txBody>
+                    <a:bodyPr/>
+                    <a:lstStyle/>
+                    <a:p>
+                      <a:r>
+                        <a:rPr lang="ko-KR" altLang="en-US" sz="1400" b="0">
+                          <a:solidFill>
+                            <a:schemeClr val="tx1"/>
+                          </a:solidFill>
+                        </a:rPr>
+                        <a:t>7문항 감정 진단 추천</a:t>
+                      </a:r>
+                    </a:p>
+                  </a:txBody>
+                  <a:tcPr anchor="ctr">
+                    <a:lnL w="12700" cap="flat" cmpd="sng" algn="ctr">
+                      <a:solidFill>
+                        <a:schemeClr val="bg1">
+                          <a:lumMod val="85000"/>
+                        </a:schemeClr>
+                      </a:solidFill>
+                      <a:prstDash val="solid"/>
+                      <a:round/>
+                      <a:headEnd type="none" w="med" len="med"/>
+                      <a:tailEnd type="none" w="med" len="med"/>
+                    </a:lnL>
+                    <a:lnR w="12700" cap="flat" cmpd="sng" algn="ctr">
+                      <a:solidFill>
+                        <a:schemeClr val="bg1">
+                          <a:lumMod val="85000"/>
+                        </a:schemeClr>
+                      </a:solidFill>
+                      <a:prstDash val="solid"/>
+                      <a:round/>
+                      <a:headEnd type="none" w="med" len="med"/>
+                      <a:tailEnd type="none" w="med" len="med"/>
+                    </a:lnR>
+                    <a:lnT w="12700" cap="flat" cmpd="sng" algn="ctr">
+                      <a:solidFill>
+                        <a:schemeClr val="bg1">
+                          <a:lumMod val="85000"/>
+                        </a:schemeClr>
+                      </a:solidFill>
+                      <a:prstDash val="solid"/>
+                      <a:round/>
+                      <a:headEnd type="none" w="med" len="med"/>
+                      <a:tailEnd type="none" w="med" len="med"/>
+                    </a:lnT>
+                    <a:lnB w="12700" cap="flat" cmpd="sng" algn="ctr">
+                      <a:solidFill>
+                        <a:schemeClr val="bg1">
+                          <a:lumMod val="85000"/>
+                        </a:schemeClr>
+                      </a:solidFill>
+                      <a:prstDash val="solid"/>
+                      <a:round/>
+                      <a:headEnd type="none" w="med" len="med"/>
+                      <a:tailEnd type="none" w="med" len="med"/>
+                    </a:lnB>
+                    <a:noFill/>
+                  </a:tcPr>
+                </a:tc>
+                <a:tc>
+                  <a:txBody>
+                    <a:bodyPr/>
+                    <a:lstStyle/>
+                    <a:p>
+                      <a:r>
+                        <a:rPr lang="ko-KR" altLang="en-US" sz="1400" b="0">
+                          <a:solidFill>
+                            <a:schemeClr val="tx1"/>
+                          </a:solidFill>
+                        </a:rPr>
+                        <a:t>7개 질문에 답하면 지금 마음 상태에 맞는 성지 1곳을 안내한다.</a:t>
+                      </a:r>
+                    </a:p>
+                  </a:txBody>
+                  <a:tcPr anchor="ctr">
+                    <a:lnL w="12700" cap="flat" cmpd="sng" algn="ctr">
+                      <a:solidFill>
+                        <a:schemeClr val="bg1">
+                          <a:lumMod val="85000"/>
+                        </a:schemeClr>
+                      </a:solidFill>
+                      <a:prstDash val="solid"/>
+                      <a:round/>
+                      <a:headEnd type="none" w="med" len="med"/>
+                      <a:tailEnd type="none" w="med" len="med"/>
+                    </a:lnL>
+                    <a:lnR w="12700" cap="flat" cmpd="sng" algn="ctr">
+                      <a:solidFill>
+                        <a:schemeClr val="bg1">
+                          <a:lumMod val="85000"/>
+                        </a:schemeClr>
+                      </a:solidFill>
+                      <a:prstDash val="solid"/>
+                      <a:round/>
+                      <a:headEnd type="none" w="med" len="med"/>
+                      <a:tailEnd type="none" w="med" len="med"/>
+                    </a:lnR>
+                    <a:lnT w="12700" cap="flat" cmpd="sng" algn="ctr">
+                      <a:solidFill>
+                        <a:schemeClr val="bg1">
+                          <a:lumMod val="85000"/>
+                        </a:schemeClr>
+                      </a:solidFill>
+                      <a:prstDash val="solid"/>
+                      <a:round/>
+                      <a:headEnd type="none" w="med" len="med"/>
+                      <a:tailEnd type="none" w="med" len="med"/>
+                    </a:lnT>
+                    <a:lnB w="12700" cap="flat" cmpd="sng" algn="ctr">
+                      <a:solidFill>
+                        <a:schemeClr val="bg1">
+                          <a:lumMod val="85000"/>
+                        </a:schemeClr>
+                      </a:solidFill>
+                      <a:prstDash val="solid"/>
+                      <a:round/>
+                      <a:headEnd type="none" w="med" len="med"/>
+                      <a:tailEnd type="none" w="med" len="med"/>
+                    </a:lnB>
+                    <a:noFill/>
+                  </a:tcPr>
+                </a:tc>
+                <a:extLst>
+                  <a:ext uri="{0D108BD9-81ED-4DB2-BD59-A6C34878D82A}">
+                    <a16:rowId xmlns:a16="http://schemas.microsoft.com/office/drawing/2014/main" val="4293083417"/>
+                  </a:ext>
+                </a:extLst>
+              </a:tr>
+            </a:tbl>
+          </a:graphicData>
+        </a:graphic>
+      </p:graphicFrame>
+      <p:sp>
+        <p:nvSpPr>
+          <p:cNvPr id="4" name="TextBox 3"/>
+          <p:cNvSpPr txBox="1"/>
+          <p:nvPr/>
+        </p:nvSpPr>
+        <p:spPr>
+          <a:xfrm>
+            <a:off x="174567" y="1101012"/>
+            <a:ext cx="3382365" cy="307777"/>
+          </a:xfrm>
+          <a:prstGeom prst="rect">
+            <a:avLst/>
+          </a:prstGeom>
+          <a:solidFill>
+            <a:srgbClr val="372472"/>
+          </a:solidFill>
+        </p:spPr>
+        <p:txBody>
+          <a:bodyPr wrap="square" rtlCol="0">
+            <a:spAutoFit/>
+          </a:bodyPr>
+          <a:lstStyle/>
+          <a:p>
+            <a:pPr algn="ctr"/>
+            <a:r>
+              <a:rPr lang="ko-KR" altLang="en-US" sz="1400" b="1" dirty="0" smtClean="0">
+                <a:solidFill>
+                  <a:schemeClr val="bg1"/>
+                </a:solidFill>
+              </a:rPr>
+              <a:t>해시태그 연계 핵심기능 및 상세내용</a:t>
+            </a:r>
+            <a:endParaRPr lang="ko-KR" altLang="en-US" sz="1400" b="1" dirty="0">
+              <a:solidFill>
+                <a:schemeClr val="bg1"/>
+              </a:solidFill>
+            </a:endParaRPr>
+          </a:p>
+        </p:txBody>
+      </p:sp>
+    </p:spTree>
+    <p:extLst>
+      <p:ext uri="{BB962C8B-B14F-4D97-AF65-F5344CB8AC3E}">
+        <p14:creationId xmlns:p14="http://schemas.microsoft.com/office/powerpoint/2010/main" val="4098688186"/>
+      </p:ext>
+    </p:extLst>
+  </p:cSld>
+  <p:clrMapOvr>
+    <a:masterClrMapping/>
+  </p:clrMapOvr>
+  <p:timing>
+    <p:tnLst>
+      <p:par>
+        <p:cTn id="1" dur="indefinite" restart="never" nodeType="tmRoot"/>
+      </p:par>
+    </p:tnLst>
+  </p:timing>
+</p:sld>
+</file>
+
+<file path=ppt/slides/slide15.xml><?xml version="1.0" encoding="utf-8"?>
+<p:sld xmlns:a="http://schemas.openxmlformats.org/drawingml/2006/main" xmlns:r="http://schemas.openxmlformats.org/officeDocument/2006/relationships" xmlns:p="http://schemas.openxmlformats.org/presentationml/2006/main">
+  <p:cSld>
+    <p:spTree>
+      <p:nvGrpSpPr>
+        <p:cNvPr id="1" name=""/>
+        <p:cNvGrpSpPr/>
+        <p:nvPr/>
+      </p:nvGrpSpPr>
+      <p:grpSpPr>
+        <a:xfrm>
+          <a:off x="0" y="0"/>
+          <a:ext cx="0" cy="0"/>
+          <a:chOff x="0" y="0"/>
+          <a:chExt cx="0" cy="0"/>
+        </a:xfrm>
+      </p:grpSpPr>
+      <p:graphicFrame>
+        <p:nvGraphicFramePr>
+          <p:cNvPr id="9" name="표 8"/>
+          <p:cNvGraphicFramePr>
+            <a:graphicFrameLocks noGrp="1"/>
+          </p:cNvGraphicFramePr>
+          <p:nvPr>
+            <p:extLst>
+              <p:ext uri="{D42A27DB-BD31-4B8C-83A1-F6EECF244321}">
+                <p14:modId xmlns:p14="http://schemas.microsoft.com/office/powerpoint/2010/main" val="1138217558"/>
+              </p:ext>
+            </p:extLst>
+          </p:nvPr>
+        </p:nvGraphicFramePr>
+        <p:xfrm>
+          <a:off x="180961" y="1551963"/>
+          <a:ext cx="11830079" cy="4993748"/>
+        </p:xfrm>
+        <a:graphic>
+          <a:graphicData uri="http://schemas.openxmlformats.org/drawingml/2006/table">
+            <a:tbl>
+              <a:tblPr firstRow="1" bandRow="1">
+                <a:tableStyleId>{5C22544A-7EE6-4342-B048-85BDC9FD1C3A}</a:tableStyleId>
+              </a:tblPr>
+              <a:tblGrid>
+                <a:gridCol w="2570619">
+                  <a:extLst>
+                    <a:ext uri="{9D8B030D-6E8A-4147-A177-3AD203B41FA5}">
+                      <a16:colId xmlns:a16="http://schemas.microsoft.com/office/drawing/2014/main" val="95366056"/>
+                    </a:ext>
+                  </a:extLst>
+                </a:gridCol>
+                <a:gridCol w="2620520">
+                  <a:extLst>
+                    <a:ext uri="{9D8B030D-6E8A-4147-A177-3AD203B41FA5}">
+                      <a16:colId xmlns:a16="http://schemas.microsoft.com/office/drawing/2014/main" val="2325135401"/>
+                    </a:ext>
+                  </a:extLst>
+                </a:gridCol>
+                <a:gridCol w="6638940">
+                  <a:extLst>
+                    <a:ext uri="{9D8B030D-6E8A-4147-A177-3AD203B41FA5}">
+                      <a16:colId xmlns:a16="http://schemas.microsoft.com/office/drawing/2014/main" val="2514411670"/>
+                    </a:ext>
+                  </a:extLst>
+                </a:gridCol>
+              </a:tblGrid>
+              <a:tr h="450256">
+                <a:tc>
+                  <a:txBody>
+                    <a:bodyPr/>
+                    <a:lstStyle/>
+                    <a:p>
+                      <a:pPr marL="0" marR="0" lvl="0" indent="0" algn="ctr" defTabSz="914400" rtl="0" eaLnBrk="1" fontAlgn="auto" latinLnBrk="1" hangingPunct="1">
+                        <a:lnSpc>
+                          <a:spcPct val="100000"/>
+                        </a:lnSpc>
+                        <a:spcBef>
+                          <a:spcPts val="0"/>
+                        </a:spcBef>
+                        <a:spcAft>
+                          <a:spcPts val="0"/>
+                        </a:spcAft>
+                        <a:buClrTx/>
+                        <a:buSzTx/>
+                        <a:buFontTx/>
+                        <a:buNone/>
+                        <a:tabLst/>
+                        <a:defRPr/>
+                      </a:pPr>
+                      <a:r>
+                        <a:rPr lang="ko-KR" altLang="en-US" sz="1600" b="1" smtClean="0">
+                          <a:solidFill>
+                            <a:schemeClr val="bg1"/>
+                          </a:solidFill>
+                        </a:rPr>
+                        <a:t>해시태그</a:t>
+                      </a:r>
+                    </a:p>
+                  </a:txBody>
+                  <a:tcPr anchor="ctr">
+                    <a:lnL w="12700" cap="flat" cmpd="sng" algn="ctr">
+                      <a:solidFill>
+                        <a:schemeClr val="bg1">
+                          <a:lumMod val="85000"/>
+                        </a:schemeClr>
+                      </a:solidFill>
+                      <a:prstDash val="solid"/>
+                      <a:round/>
+                      <a:headEnd type="none" w="med" len="med"/>
+                      <a:tailEnd type="none" w="med" len="med"/>
+                    </a:lnL>
+                    <a:lnR w="12700" cap="flat" cmpd="sng" algn="ctr">
+                      <a:solidFill>
+                        <a:schemeClr val="bg1">
+                          <a:lumMod val="85000"/>
+                        </a:schemeClr>
+                      </a:solidFill>
+                      <a:prstDash val="solid"/>
+                      <a:round/>
+                      <a:headEnd type="none" w="med" len="med"/>
+                      <a:tailEnd type="none" w="med" len="med"/>
+                    </a:lnR>
+                    <a:lnT w="12700" cap="flat" cmpd="sng" algn="ctr">
+                      <a:solidFill>
+                        <a:schemeClr val="bg1">
+                          <a:lumMod val="85000"/>
+                        </a:schemeClr>
+                      </a:solidFill>
+                      <a:prstDash val="solid"/>
+                      <a:round/>
+                      <a:headEnd type="none" w="med" len="med"/>
+                      <a:tailEnd type="none" w="med" len="med"/>
+                    </a:lnT>
+                    <a:lnB w="12700" cap="flat" cmpd="sng" algn="ctr">
+                      <a:solidFill>
+                        <a:schemeClr val="bg1">
+                          <a:lumMod val="85000"/>
+                        </a:schemeClr>
+                      </a:solidFill>
+                      <a:prstDash val="solid"/>
+                      <a:round/>
+                      <a:headEnd type="none" w="med" len="med"/>
+                      <a:tailEnd type="none" w="med" len="med"/>
+                    </a:lnB>
+                    <a:solidFill>
+                      <a:srgbClr val="499DBF"/>
+                    </a:solidFill>
+                  </a:tcPr>
+                </a:tc>
+                <a:tc>
+                  <a:txBody>
+                    <a:bodyPr/>
+                    <a:lstStyle/>
+                    <a:p>
+                      <a:pPr marL="0" marR="0" lvl="0" indent="0" algn="ctr" defTabSz="914400" rtl="0" eaLnBrk="1" fontAlgn="auto" latinLnBrk="1" hangingPunct="1">
+                        <a:lnSpc>
+                          <a:spcPct val="100000"/>
+                        </a:lnSpc>
+                        <a:spcBef>
+                          <a:spcPts val="0"/>
+                        </a:spcBef>
+                        <a:spcAft>
+                          <a:spcPts val="0"/>
+                        </a:spcAft>
+                        <a:buClrTx/>
+                        <a:buSzTx/>
+                        <a:buFontTx/>
+                        <a:buNone/>
+                        <a:tabLst/>
+                        <a:defRPr/>
+                      </a:pPr>
+                      <a:r>
+                        <a:rPr lang="ko-KR" altLang="en-US" sz="1600" b="1" smtClean="0">
+                          <a:solidFill>
+                            <a:schemeClr val="bg1"/>
+                          </a:solidFill>
+                        </a:rPr>
+                        <a:t>연계 기능</a:t>
+                      </a:r>
+                      <a:endParaRPr lang="ko-KR" altLang="en-US" sz="1600" b="1">
+                        <a:solidFill>
+                          <a:schemeClr val="bg1"/>
+                        </a:solidFill>
+                      </a:endParaRPr>
+                    </a:p>
+                  </a:txBody>
+                  <a:tcPr anchor="ctr">
+                    <a:lnL w="12700" cap="flat" cmpd="sng" algn="ctr">
+                      <a:solidFill>
+                        <a:schemeClr val="bg1">
+                          <a:lumMod val="85000"/>
+                        </a:schemeClr>
+                      </a:solidFill>
+                      <a:prstDash val="solid"/>
+                      <a:round/>
+                      <a:headEnd type="none" w="med" len="med"/>
+                      <a:tailEnd type="none" w="med" len="med"/>
+                    </a:lnL>
+                    <a:lnR w="12700" cap="flat" cmpd="sng" algn="ctr">
+                      <a:solidFill>
+                        <a:schemeClr val="bg1">
+                          <a:lumMod val="85000"/>
+                        </a:schemeClr>
+                      </a:solidFill>
+                      <a:prstDash val="solid"/>
+                      <a:round/>
+                      <a:headEnd type="none" w="med" len="med"/>
+                      <a:tailEnd type="none" w="med" len="med"/>
+                    </a:lnR>
+                    <a:lnT w="12700" cap="flat" cmpd="sng" algn="ctr">
+                      <a:solidFill>
+                        <a:schemeClr val="bg1">
+                          <a:lumMod val="85000"/>
+                        </a:schemeClr>
+                      </a:solidFill>
+                      <a:prstDash val="solid"/>
+                      <a:round/>
+                      <a:headEnd type="none" w="med" len="med"/>
+                      <a:tailEnd type="none" w="med" len="med"/>
+                    </a:lnT>
+                    <a:lnB w="12700" cap="flat" cmpd="sng" algn="ctr">
+                      <a:solidFill>
+                        <a:schemeClr val="bg1">
+                          <a:lumMod val="85000"/>
+                        </a:schemeClr>
+                      </a:solidFill>
+                      <a:prstDash val="solid"/>
+                      <a:round/>
+                      <a:headEnd type="none" w="med" len="med"/>
+                      <a:tailEnd type="none" w="med" len="med"/>
+                    </a:lnB>
+                    <a:solidFill>
+                      <a:srgbClr val="499DBF"/>
+                    </a:solidFill>
+                  </a:tcPr>
+                </a:tc>
+                <a:tc>
+                  <a:txBody>
+                    <a:bodyPr/>
+                    <a:lstStyle/>
+                    <a:p>
+                      <a:pPr marL="0" marR="0" lvl="0" indent="0" algn="ctr" defTabSz="914400" rtl="0" eaLnBrk="1" fontAlgn="auto" latinLnBrk="1" hangingPunct="1">
+                        <a:lnSpc>
+                          <a:spcPct val="100000"/>
+                        </a:lnSpc>
+                        <a:spcBef>
+                          <a:spcPts val="0"/>
+                        </a:spcBef>
+                        <a:spcAft>
+                          <a:spcPts val="0"/>
+                        </a:spcAft>
+                        <a:buClrTx/>
+                        <a:buSzTx/>
+                        <a:buFontTx/>
+                        <a:buNone/>
+                        <a:tabLst/>
+                        <a:defRPr/>
+                      </a:pPr>
+                      <a:r>
+                        <a:rPr lang="ko-KR" altLang="en-US" sz="1600" b="1" baseline="0" smtClean="0">
+                          <a:solidFill>
+                            <a:schemeClr val="bg1"/>
+                          </a:solidFill>
+                        </a:rPr>
+                        <a:t>연계 상세 내용</a:t>
+                      </a:r>
+                      <a:endParaRPr lang="ko-KR" altLang="en-US" sz="1600" b="1">
+                        <a:solidFill>
+                          <a:schemeClr val="bg1"/>
+                        </a:solidFill>
+                      </a:endParaRPr>
+                    </a:p>
+                  </a:txBody>
+                  <a:tcPr anchor="ctr">
+                    <a:lnL w="12700" cap="flat" cmpd="sng" algn="ctr">
+                      <a:solidFill>
+                        <a:schemeClr val="bg1">
+                          <a:lumMod val="85000"/>
+                        </a:schemeClr>
+                      </a:solidFill>
+                      <a:prstDash val="solid"/>
+                      <a:round/>
+                      <a:headEnd type="none" w="med" len="med"/>
+                      <a:tailEnd type="none" w="med" len="med"/>
+                    </a:lnL>
+                    <a:lnR w="12700" cap="flat" cmpd="sng" algn="ctr">
+                      <a:solidFill>
+                        <a:schemeClr val="bg1">
+                          <a:lumMod val="85000"/>
+                        </a:schemeClr>
+                      </a:solidFill>
+                      <a:prstDash val="solid"/>
+                      <a:round/>
+                      <a:headEnd type="none" w="med" len="med"/>
+                      <a:tailEnd type="none" w="med" len="med"/>
+                    </a:lnR>
+                    <a:lnT w="12700" cap="flat" cmpd="sng" algn="ctr">
+                      <a:solidFill>
+                        <a:schemeClr val="bg1">
+                          <a:lumMod val="85000"/>
+                        </a:schemeClr>
+                      </a:solidFill>
+                      <a:prstDash val="solid"/>
+                      <a:round/>
+                      <a:headEnd type="none" w="med" len="med"/>
+                      <a:tailEnd type="none" w="med" len="med"/>
+                    </a:lnT>
+                    <a:lnB w="12700" cap="flat" cmpd="sng" algn="ctr">
+                      <a:solidFill>
+                        <a:schemeClr val="bg1">
+                          <a:lumMod val="85000"/>
+                        </a:schemeClr>
+                      </a:solidFill>
+                      <a:prstDash val="solid"/>
+                      <a:round/>
+                      <a:headEnd type="none" w="med" len="med"/>
+                      <a:tailEnd type="none" w="med" len="med"/>
+                    </a:lnB>
+                    <a:solidFill>
+                      <a:srgbClr val="499DBF"/>
+                    </a:solidFill>
+                  </a:tcPr>
+                </a:tc>
+                <a:extLst>
+                  <a:ext uri="{0D108BD9-81ED-4DB2-BD59-A6C34878D82A}">
+                    <a16:rowId xmlns:a16="http://schemas.microsoft.com/office/drawing/2014/main" val="3357600838"/>
+                  </a:ext>
+                </a:extLst>
+              </a:tr>
+              <a:tr h="4543492">
+                <a:tc>
+                  <a:txBody>
+                    <a:bodyPr/>
+                    <a:lstStyle/>
+                    <a:p>
+                      <a:r>
+                        <a:rPr lang="ko-KR" altLang="en-US" sz="1400" b="0">
+                          <a:solidFill>
+                            <a:schemeClr val="tx1"/>
+                          </a:solidFill>
+                        </a:rPr>
+                        <a:t>#순례가이드미카엘</a:t>
+                      </a:r>
+                    </a:p>
+                  </a:txBody>
+                  <a:tcPr anchor="ctr">
+                    <a:lnL w="12700" cap="flat" cmpd="sng" algn="ctr">
+                      <a:solidFill>
+                        <a:schemeClr val="bg1">
+                          <a:lumMod val="85000"/>
+                        </a:schemeClr>
+                      </a:solidFill>
+                      <a:prstDash val="solid"/>
+                      <a:round/>
+                      <a:headEnd type="none" w="med" len="med"/>
+                      <a:tailEnd type="none" w="med" len="med"/>
+                    </a:lnL>
+                    <a:lnR w="12700" cap="flat" cmpd="sng" algn="ctr">
+                      <a:solidFill>
+                        <a:schemeClr val="bg1">
+                          <a:lumMod val="85000"/>
+                        </a:schemeClr>
+                      </a:solidFill>
+                      <a:prstDash val="solid"/>
+                      <a:round/>
+                      <a:headEnd type="none" w="med" len="med"/>
+                      <a:tailEnd type="none" w="med" len="med"/>
+                    </a:lnR>
+                    <a:lnT w="12700" cap="flat" cmpd="sng" algn="ctr">
+                      <a:solidFill>
+                        <a:schemeClr val="bg1">
+                          <a:lumMod val="85000"/>
+                        </a:schemeClr>
+                      </a:solidFill>
+                      <a:prstDash val="solid"/>
+                      <a:round/>
+                      <a:headEnd type="none" w="med" len="med"/>
+                      <a:tailEnd type="none" w="med" len="med"/>
+                    </a:lnT>
+                    <a:lnB w="12700" cap="flat" cmpd="sng" algn="ctr">
+                      <a:solidFill>
+                        <a:schemeClr val="bg1">
+                          <a:lumMod val="85000"/>
+                        </a:schemeClr>
+                      </a:solidFill>
+                      <a:prstDash val="solid"/>
+                      <a:round/>
+                      <a:headEnd type="none" w="med" len="med"/>
+                      <a:tailEnd type="none" w="med" len="med"/>
+                    </a:lnB>
+                    <a:noFill/>
+                  </a:tcPr>
+                </a:tc>
+                <a:tc>
+                  <a:txBody>
+                    <a:bodyPr/>
+                    <a:lstStyle/>
+                    <a:p>
+                      <a:r>
+                        <a:rPr lang="ko-KR" altLang="en-US" sz="1400" b="0">
+                          <a:solidFill>
+                            <a:schemeClr val="tx1"/>
+                          </a:solidFill>
+                        </a:rPr>
+                        <a:t>성지 DB 범위 제한 AI 챗봇</a:t>
+                      </a:r>
+                    </a:p>
+                  </a:txBody>
+                  <a:tcPr anchor="ctr">
+                    <a:lnL w="12700" cap="flat" cmpd="sng" algn="ctr">
+                      <a:solidFill>
+                        <a:schemeClr val="bg1">
+                          <a:lumMod val="85000"/>
+                        </a:schemeClr>
+                      </a:solidFill>
+                      <a:prstDash val="solid"/>
+                      <a:round/>
+                      <a:headEnd type="none" w="med" len="med"/>
+                      <a:tailEnd type="none" w="med" len="med"/>
+                    </a:lnL>
+                    <a:lnR w="12700" cap="flat" cmpd="sng" algn="ctr">
+                      <a:solidFill>
+                        <a:schemeClr val="bg1">
+                          <a:lumMod val="85000"/>
+                        </a:schemeClr>
+                      </a:solidFill>
+                      <a:prstDash val="solid"/>
+                      <a:round/>
+                      <a:headEnd type="none" w="med" len="med"/>
+                      <a:tailEnd type="none" w="med" len="med"/>
+                    </a:lnR>
+                    <a:lnT w="12700" cap="flat" cmpd="sng" algn="ctr">
+                      <a:solidFill>
+                        <a:schemeClr val="bg1">
+                          <a:lumMod val="85000"/>
+                        </a:schemeClr>
+                      </a:solidFill>
+                      <a:prstDash val="solid"/>
+                      <a:round/>
+                      <a:headEnd type="none" w="med" len="med"/>
+                      <a:tailEnd type="none" w="med" len="med"/>
+                    </a:lnT>
+                    <a:lnB w="12700" cap="flat" cmpd="sng" algn="ctr">
+                      <a:solidFill>
+                        <a:schemeClr val="bg1">
+                          <a:lumMod val="85000"/>
+                        </a:schemeClr>
+                      </a:solidFill>
+                      <a:prstDash val="solid"/>
+                      <a:round/>
+                      <a:headEnd type="none" w="med" len="med"/>
+                      <a:tailEnd type="none" w="med" len="med"/>
+                    </a:lnB>
+                    <a:noFill/>
+                  </a:tcPr>
+                </a:tc>
+                <a:tc>
+                  <a:txBody>
+                    <a:bodyPr/>
+                    <a:lstStyle/>
+                    <a:p>
+                      <a:r>
+                        <a:rPr lang="ko-KR" altLang="en-US" sz="1400" b="0">
+                          <a:solidFill>
+                            <a:schemeClr val="tx1"/>
+                          </a:solidFill>
+                        </a:rPr>
+                        <a:t>Gemini 기반 대화형 가이드가 질문과 관련된 성지 DB 레코드만 컨텍스트로 사용하며, 컨텍스트에 없는 내용은 "모른다"고 답해 종교 성지 정보의 오답을 막는다.</a:t>
+                      </a:r>
+                    </a:p>
+                  </a:txBody>
+                  <a:tcPr anchor="ctr">
+                    <a:lnL w="12700" cap="flat" cmpd="sng" algn="ctr">
+                      <a:solidFill>
+                        <a:schemeClr val="bg1">
+                          <a:lumMod val="85000"/>
+                        </a:schemeClr>
+                      </a:solidFill>
+                      <a:prstDash val="solid"/>
+                      <a:round/>
+                      <a:headEnd type="none" w="med" len="med"/>
+                      <a:tailEnd type="none" w="med" len="med"/>
+                    </a:lnL>
+                    <a:lnR w="12700" cap="flat" cmpd="sng" algn="ctr">
+                      <a:solidFill>
+                        <a:schemeClr val="bg1">
+                          <a:lumMod val="85000"/>
+                        </a:schemeClr>
+                      </a:solidFill>
+                      <a:prstDash val="solid"/>
+                      <a:round/>
+                      <a:headEnd type="none" w="med" len="med"/>
+                      <a:tailEnd type="none" w="med" len="med"/>
+                    </a:lnR>
+                    <a:lnT w="12700" cap="flat" cmpd="sng" algn="ctr">
+                      <a:solidFill>
+                        <a:schemeClr val="bg1">
+                          <a:lumMod val="85000"/>
+                        </a:schemeClr>
+                      </a:solidFill>
+                      <a:prstDash val="solid"/>
+                      <a:round/>
+                      <a:headEnd type="none" w="med" len="med"/>
+                      <a:tailEnd type="none" w="med" len="med"/>
+                    </a:lnT>
+                    <a:lnB w="12700" cap="flat" cmpd="sng" algn="ctr">
+                      <a:solidFill>
+                        <a:schemeClr val="bg1">
+                          <a:lumMod val="85000"/>
+                        </a:schemeClr>
+                      </a:solidFill>
+                      <a:prstDash val="solid"/>
+                      <a:round/>
+                      <a:headEnd type="none" w="med" len="med"/>
+                      <a:tailEnd type="none" w="med" len="med"/>
+                    </a:lnB>
+                    <a:noFill/>
+                  </a:tcPr>
+                </a:tc>
+                <a:extLst>
+                  <a:ext uri="{0D108BD9-81ED-4DB2-BD59-A6C34878D82A}">
+                    <a16:rowId xmlns:a16="http://schemas.microsoft.com/office/drawing/2014/main" val="4293083417"/>
+                  </a:ext>
+                </a:extLst>
+              </a:tr>
+            </a:tbl>
+          </a:graphicData>
+        </a:graphic>
+      </p:graphicFrame>
+      <p:sp>
+        <p:nvSpPr>
+          <p:cNvPr id="4" name="TextBox 3"/>
+          <p:cNvSpPr txBox="1"/>
+          <p:nvPr/>
+        </p:nvSpPr>
+        <p:spPr>
+          <a:xfrm>
+            <a:off x="174567" y="1101012"/>
+            <a:ext cx="3382365" cy="307777"/>
+          </a:xfrm>
+          <a:prstGeom prst="rect">
+            <a:avLst/>
+          </a:prstGeom>
+          <a:solidFill>
+            <a:srgbClr val="372472"/>
+          </a:solidFill>
+        </p:spPr>
+        <p:txBody>
+          <a:bodyPr wrap="square" rtlCol="0">
+            <a:spAutoFit/>
+          </a:bodyPr>
+          <a:lstStyle/>
+          <a:p>
+            <a:pPr algn="ctr"/>
+            <a:r>
+              <a:rPr lang="ko-KR" altLang="en-US" sz="1400" b="1" dirty="0" smtClean="0">
+                <a:solidFill>
+                  <a:schemeClr val="bg1"/>
+                </a:solidFill>
+              </a:rPr>
+              <a:t>해시태그 연계 핵심기능 및 상세내용</a:t>
+            </a:r>
+            <a:endParaRPr lang="ko-KR" altLang="en-US" sz="1400" b="1" dirty="0">
+              <a:solidFill>
+                <a:schemeClr val="bg1"/>
+              </a:solidFill>
+            </a:endParaRPr>
+          </a:p>
+        </p:txBody>
+      </p:sp>
+    </p:spTree>
+    <p:extLst>
+      <p:ext uri="{BB962C8B-B14F-4D97-AF65-F5344CB8AC3E}">
+        <p14:creationId xmlns:p14="http://schemas.microsoft.com/office/powerpoint/2010/main" val="4098688186"/>
+      </p:ext>
+    </p:extLst>
+  </p:cSld>
+  <p:clrMapOvr>
+    <a:masterClrMapping/>
+  </p:clrMapOvr>
+  <p:timing>
+    <p:tnLst>
+      <p:par>
+        <p:cTn id="1" dur="indefinite" restart="never" nodeType="tmRoot"/>
+      </p:par>
+    </p:tnLst>
+  </p:timing>
+</p:sld>
+</file>
+
 <file path=ppt/slides/slide2.xml><?xml version="1.0" encoding="utf-8"?>
 <p:sld xmlns:a="http://schemas.openxmlformats.org/drawingml/2006/main" xmlns:r="http://schemas.openxmlformats.org/officeDocument/2006/relationships" xmlns:p="http://schemas.openxmlformats.org/presentationml/2006/main">
   <p:cSld>
@@ -7976,594 +9743,6 @@
                           </a:solidFill>
                         </a:rPr>
                         <a:t>TourAPI 전국 축제·명소 데이터를 매일 합산해 성지별 붐빔 지수(0~100)를 계산하고, 지수가 낮은 성지를 홈 화면 '오늘의 쉼표' 섹션에서 실시간으로 추천한다.</a:t>
-                      </a:r>
-                    </a:p>
-                  </a:txBody>
-                  <a:tcPr anchor="ctr">
-                    <a:lnL w="12700" cap="flat" cmpd="sng" algn="ctr">
-                      <a:solidFill>
-                        <a:schemeClr val="bg1">
-                          <a:lumMod val="85000"/>
-                        </a:schemeClr>
-                      </a:solidFill>
-                      <a:prstDash val="solid"/>
-                      <a:round/>
-                      <a:headEnd type="none" w="med" len="med"/>
-                      <a:tailEnd type="none" w="med" len="med"/>
-                    </a:lnL>
-                    <a:lnR w="12700" cap="flat" cmpd="sng" algn="ctr">
-                      <a:solidFill>
-                        <a:schemeClr val="bg1">
-                          <a:lumMod val="85000"/>
-                        </a:schemeClr>
-                      </a:solidFill>
-                      <a:prstDash val="solid"/>
-                      <a:round/>
-                      <a:headEnd type="none" w="med" len="med"/>
-                      <a:tailEnd type="none" w="med" len="med"/>
-                    </a:lnR>
-                    <a:lnT w="12700" cap="flat" cmpd="sng" algn="ctr">
-                      <a:solidFill>
-                        <a:schemeClr val="bg1">
-                          <a:lumMod val="85000"/>
-                        </a:schemeClr>
-                      </a:solidFill>
-                      <a:prstDash val="solid"/>
-                      <a:round/>
-                      <a:headEnd type="none" w="med" len="med"/>
-                      <a:tailEnd type="none" w="med" len="med"/>
-                    </a:lnT>
-                    <a:lnB w="12700" cap="flat" cmpd="sng" algn="ctr">
-                      <a:solidFill>
-                        <a:schemeClr val="bg1">
-                          <a:lumMod val="85000"/>
-                        </a:schemeClr>
-                      </a:solidFill>
-                      <a:prstDash val="solid"/>
-                      <a:round/>
-                      <a:headEnd type="none" w="med" len="med"/>
-                      <a:tailEnd type="none" w="med" len="med"/>
-                    </a:lnB>
-                    <a:noFill/>
-                  </a:tcPr>
-                </a:tc>
-                <a:extLst>
-                  <a:ext uri="{0D108BD9-81ED-4DB2-BD59-A6C34878D82A}">
-                    <a16:rowId xmlns:a16="http://schemas.microsoft.com/office/drawing/2014/main" val="4293083417"/>
-                  </a:ext>
-                </a:extLst>
-              </a:tr>
-              <a:tr h="4543492">
-                <a:tc>
-                  <a:txBody>
-                    <a:bodyPr/>
-                    <a:lstStyle/>
-                    <a:p>
-                      <a:r>
-                        <a:rPr lang="ko-KR" altLang="en-US" sz="1400" b="0">
-                          <a:solidFill>
-                            <a:schemeClr val="tx1"/>
-                          </a:solidFill>
-                        </a:rPr>
-                        <a:t>#쉼표순례길</a:t>
-                      </a:r>
-                    </a:p>
-                  </a:txBody>
-                  <a:tcPr anchor="ctr">
-                    <a:lnL w="12700" cap="flat" cmpd="sng" algn="ctr">
-                      <a:solidFill>
-                        <a:schemeClr val="bg1">
-                          <a:lumMod val="85000"/>
-                        </a:schemeClr>
-                      </a:solidFill>
-                      <a:prstDash val="solid"/>
-                      <a:round/>
-                      <a:headEnd type="none" w="med" len="med"/>
-                      <a:tailEnd type="none" w="med" len="med"/>
-                    </a:lnL>
-                    <a:lnR w="12700" cap="flat" cmpd="sng" algn="ctr">
-                      <a:solidFill>
-                        <a:schemeClr val="bg1">
-                          <a:lumMod val="85000"/>
-                        </a:schemeClr>
-                      </a:solidFill>
-                      <a:prstDash val="solid"/>
-                      <a:round/>
-                      <a:headEnd type="none" w="med" len="med"/>
-                      <a:tailEnd type="none" w="med" len="med"/>
-                    </a:lnR>
-                    <a:lnT w="12700" cap="flat" cmpd="sng" algn="ctr">
-                      <a:solidFill>
-                        <a:schemeClr val="bg1">
-                          <a:lumMod val="85000"/>
-                        </a:schemeClr>
-                      </a:solidFill>
-                      <a:prstDash val="solid"/>
-                      <a:round/>
-                      <a:headEnd type="none" w="med" len="med"/>
-                      <a:tailEnd type="none" w="med" len="med"/>
-                    </a:lnT>
-                    <a:lnB w="12700" cap="flat" cmpd="sng" algn="ctr">
-                      <a:solidFill>
-                        <a:schemeClr val="bg1">
-                          <a:lumMod val="85000"/>
-                        </a:schemeClr>
-                      </a:solidFill>
-                      <a:prstDash val="solid"/>
-                      <a:round/>
-                      <a:headEnd type="none" w="med" len="med"/>
-                      <a:tailEnd type="none" w="med" len="med"/>
-                    </a:lnB>
-                    <a:noFill/>
-                  </a:tcPr>
-                </a:tc>
-                <a:tc>
-                  <a:txBody>
-                    <a:bodyPr/>
-                    <a:lstStyle/>
-                    <a:p>
-                      <a:r>
-                        <a:rPr lang="ko-KR" altLang="en-US" sz="1400" b="0">
-                          <a:solidFill>
-                            <a:schemeClr val="tx1"/>
-                          </a:solidFill>
-                        </a:rPr>
-                        <a:t>감정 기반 코스 매칭</a:t>
-                      </a:r>
-                    </a:p>
-                  </a:txBody>
-                  <a:tcPr anchor="ctr">
-                    <a:lnL w="12700" cap="flat" cmpd="sng" algn="ctr">
-                      <a:solidFill>
-                        <a:schemeClr val="bg1">
-                          <a:lumMod val="85000"/>
-                        </a:schemeClr>
-                      </a:solidFill>
-                      <a:prstDash val="solid"/>
-                      <a:round/>
-                      <a:headEnd type="none" w="med" len="med"/>
-                      <a:tailEnd type="none" w="med" len="med"/>
-                    </a:lnL>
-                    <a:lnR w="12700" cap="flat" cmpd="sng" algn="ctr">
-                      <a:solidFill>
-                        <a:schemeClr val="bg1">
-                          <a:lumMod val="85000"/>
-                        </a:schemeClr>
-                      </a:solidFill>
-                      <a:prstDash val="solid"/>
-                      <a:round/>
-                      <a:headEnd type="none" w="med" len="med"/>
-                      <a:tailEnd type="none" w="med" len="med"/>
-                    </a:lnR>
-                    <a:lnT w="12700" cap="flat" cmpd="sng" algn="ctr">
-                      <a:solidFill>
-                        <a:schemeClr val="bg1">
-                          <a:lumMod val="85000"/>
-                        </a:schemeClr>
-                      </a:solidFill>
-                      <a:prstDash val="solid"/>
-                      <a:round/>
-                      <a:headEnd type="none" w="med" len="med"/>
-                      <a:tailEnd type="none" w="med" len="med"/>
-                    </a:lnT>
-                    <a:lnB w="12700" cap="flat" cmpd="sng" algn="ctr">
-                      <a:solidFill>
-                        <a:schemeClr val="bg1">
-                          <a:lumMod val="85000"/>
-                        </a:schemeClr>
-                      </a:solidFill>
-                      <a:prstDash val="solid"/>
-                      <a:round/>
-                      <a:headEnd type="none" w="med" len="med"/>
-                      <a:tailEnd type="none" w="med" len="med"/>
-                    </a:lnB>
-                    <a:noFill/>
-                  </a:tcPr>
-                </a:tc>
-                <a:tc>
-                  <a:txBody>
-                    <a:bodyPr/>
-                    <a:lstStyle/>
-                    <a:p>
-                      <a:r>
-                        <a:rPr lang="ko-KR" altLang="en-US" sz="1400" b="0">
-                          <a:solidFill>
-                            <a:schemeClr val="tx1"/>
-                          </a:solidFill>
-                        </a:rPr>
-                        <a:t>위로/새출발/평온/치유/감사 5개 감정 중 하나를 고르면 해당 감정의 성지 후보를 조회하고, 좌표가 있는 성지는 TourAPI 반경 검색으로 도보권 관광지를 실시간 페어링해 '성지+관광지' 코스 카드로 제공한다.</a:t>
-                      </a:r>
-                    </a:p>
-                  </a:txBody>
-                  <a:tcPr anchor="ctr">
-                    <a:lnL w="12700" cap="flat" cmpd="sng" algn="ctr">
-                      <a:solidFill>
-                        <a:schemeClr val="bg1">
-                          <a:lumMod val="85000"/>
-                        </a:schemeClr>
-                      </a:solidFill>
-                      <a:prstDash val="solid"/>
-                      <a:round/>
-                      <a:headEnd type="none" w="med" len="med"/>
-                      <a:tailEnd type="none" w="med" len="med"/>
-                    </a:lnL>
-                    <a:lnR w="12700" cap="flat" cmpd="sng" algn="ctr">
-                      <a:solidFill>
-                        <a:schemeClr val="bg1">
-                          <a:lumMod val="85000"/>
-                        </a:schemeClr>
-                      </a:solidFill>
-                      <a:prstDash val="solid"/>
-                      <a:round/>
-                      <a:headEnd type="none" w="med" len="med"/>
-                      <a:tailEnd type="none" w="med" len="med"/>
-                    </a:lnR>
-                    <a:lnT w="12700" cap="flat" cmpd="sng" algn="ctr">
-                      <a:solidFill>
-                        <a:schemeClr val="bg1">
-                          <a:lumMod val="85000"/>
-                        </a:schemeClr>
-                      </a:solidFill>
-                      <a:prstDash val="solid"/>
-                      <a:round/>
-                      <a:headEnd type="none" w="med" len="med"/>
-                      <a:tailEnd type="none" w="med" len="med"/>
-                    </a:lnT>
-                    <a:lnB w="12700" cap="flat" cmpd="sng" algn="ctr">
-                      <a:solidFill>
-                        <a:schemeClr val="bg1">
-                          <a:lumMod val="85000"/>
-                        </a:schemeClr>
-                      </a:solidFill>
-                      <a:prstDash val="solid"/>
-                      <a:round/>
-                      <a:headEnd type="none" w="med" len="med"/>
-                      <a:tailEnd type="none" w="med" len="med"/>
-                    </a:lnB>
-                    <a:noFill/>
-                  </a:tcPr>
-                </a:tc>
-                <a:extLst>
-                  <a:ext uri="{0D108BD9-81ED-4DB2-BD59-A6C34878D82A}">
-                    <a16:rowId xmlns:a16="http://schemas.microsoft.com/office/drawing/2014/main" val="4293083417"/>
-                  </a:ext>
-                </a:extLst>
-              </a:tr>
-              <a:tr h="4543492">
-                <a:tc>
-                  <a:txBody>
-                    <a:bodyPr/>
-                    <a:lstStyle/>
-                    <a:p>
-                      <a:r>
-                        <a:rPr lang="ko-KR" altLang="en-US" sz="1400" b="0">
-                          <a:solidFill>
-                            <a:schemeClr val="tx1"/>
-                          </a:solidFill>
-                        </a:rPr>
-                        <a:t>#마음나침반</a:t>
-                      </a:r>
-                    </a:p>
-                  </a:txBody>
-                  <a:tcPr anchor="ctr">
-                    <a:lnL w="12700" cap="flat" cmpd="sng" algn="ctr">
-                      <a:solidFill>
-                        <a:schemeClr val="bg1">
-                          <a:lumMod val="85000"/>
-                        </a:schemeClr>
-                      </a:solidFill>
-                      <a:prstDash val="solid"/>
-                      <a:round/>
-                      <a:headEnd type="none" w="med" len="med"/>
-                      <a:tailEnd type="none" w="med" len="med"/>
-                    </a:lnL>
-                    <a:lnR w="12700" cap="flat" cmpd="sng" algn="ctr">
-                      <a:solidFill>
-                        <a:schemeClr val="bg1">
-                          <a:lumMod val="85000"/>
-                        </a:schemeClr>
-                      </a:solidFill>
-                      <a:prstDash val="solid"/>
-                      <a:round/>
-                      <a:headEnd type="none" w="med" len="med"/>
-                      <a:tailEnd type="none" w="med" len="med"/>
-                    </a:lnR>
-                    <a:lnT w="12700" cap="flat" cmpd="sng" algn="ctr">
-                      <a:solidFill>
-                        <a:schemeClr val="bg1">
-                          <a:lumMod val="85000"/>
-                        </a:schemeClr>
-                      </a:solidFill>
-                      <a:prstDash val="solid"/>
-                      <a:round/>
-                      <a:headEnd type="none" w="med" len="med"/>
-                      <a:tailEnd type="none" w="med" len="med"/>
-                    </a:lnT>
-                    <a:lnB w="12700" cap="flat" cmpd="sng" algn="ctr">
-                      <a:solidFill>
-                        <a:schemeClr val="bg1">
-                          <a:lumMod val="85000"/>
-                        </a:schemeClr>
-                      </a:solidFill>
-                      <a:prstDash val="solid"/>
-                      <a:round/>
-                      <a:headEnd type="none" w="med" len="med"/>
-                      <a:tailEnd type="none" w="med" len="med"/>
-                    </a:lnB>
-                    <a:noFill/>
-                  </a:tcPr>
-                </a:tc>
-                <a:tc>
-                  <a:txBody>
-                    <a:bodyPr/>
-                    <a:lstStyle/>
-                    <a:p>
-                      <a:r>
-                        <a:rPr lang="ko-KR" altLang="en-US" sz="1400" b="0">
-                          <a:solidFill>
-                            <a:schemeClr val="tx1"/>
-                          </a:solidFill>
-                        </a:rPr>
-                        <a:t>7문항 감정 진단 추천</a:t>
-                      </a:r>
-                    </a:p>
-                  </a:txBody>
-                  <a:tcPr anchor="ctr">
-                    <a:lnL w="12700" cap="flat" cmpd="sng" algn="ctr">
-                      <a:solidFill>
-                        <a:schemeClr val="bg1">
-                          <a:lumMod val="85000"/>
-                        </a:schemeClr>
-                      </a:solidFill>
-                      <a:prstDash val="solid"/>
-                      <a:round/>
-                      <a:headEnd type="none" w="med" len="med"/>
-                      <a:tailEnd type="none" w="med" len="med"/>
-                    </a:lnL>
-                    <a:lnR w="12700" cap="flat" cmpd="sng" algn="ctr">
-                      <a:solidFill>
-                        <a:schemeClr val="bg1">
-                          <a:lumMod val="85000"/>
-                        </a:schemeClr>
-                      </a:solidFill>
-                      <a:prstDash val="solid"/>
-                      <a:round/>
-                      <a:headEnd type="none" w="med" len="med"/>
-                      <a:tailEnd type="none" w="med" len="med"/>
-                    </a:lnR>
-                    <a:lnT w="12700" cap="flat" cmpd="sng" algn="ctr">
-                      <a:solidFill>
-                        <a:schemeClr val="bg1">
-                          <a:lumMod val="85000"/>
-                        </a:schemeClr>
-                      </a:solidFill>
-                      <a:prstDash val="solid"/>
-                      <a:round/>
-                      <a:headEnd type="none" w="med" len="med"/>
-                      <a:tailEnd type="none" w="med" len="med"/>
-                    </a:lnT>
-                    <a:lnB w="12700" cap="flat" cmpd="sng" algn="ctr">
-                      <a:solidFill>
-                        <a:schemeClr val="bg1">
-                          <a:lumMod val="85000"/>
-                        </a:schemeClr>
-                      </a:solidFill>
-                      <a:prstDash val="solid"/>
-                      <a:round/>
-                      <a:headEnd type="none" w="med" len="med"/>
-                      <a:tailEnd type="none" w="med" len="med"/>
-                    </a:lnB>
-                    <a:noFill/>
-                  </a:tcPr>
-                </a:tc>
-                <a:tc>
-                  <a:txBody>
-                    <a:bodyPr/>
-                    <a:lstStyle/>
-                    <a:p>
-                      <a:r>
-                        <a:rPr lang="ko-KR" altLang="en-US" sz="1400" b="0">
-                          <a:solidFill>
-                            <a:schemeClr val="tx1"/>
-                          </a:solidFill>
-                        </a:rPr>
-                        <a:t>7개 질문에 답하면 지금 마음 상태에 맞는 성지 1곳을 안내한다.</a:t>
-                      </a:r>
-                    </a:p>
-                  </a:txBody>
-                  <a:tcPr anchor="ctr">
-                    <a:lnL w="12700" cap="flat" cmpd="sng" algn="ctr">
-                      <a:solidFill>
-                        <a:schemeClr val="bg1">
-                          <a:lumMod val="85000"/>
-                        </a:schemeClr>
-                      </a:solidFill>
-                      <a:prstDash val="solid"/>
-                      <a:round/>
-                      <a:headEnd type="none" w="med" len="med"/>
-                      <a:tailEnd type="none" w="med" len="med"/>
-                    </a:lnL>
-                    <a:lnR w="12700" cap="flat" cmpd="sng" algn="ctr">
-                      <a:solidFill>
-                        <a:schemeClr val="bg1">
-                          <a:lumMod val="85000"/>
-                        </a:schemeClr>
-                      </a:solidFill>
-                      <a:prstDash val="solid"/>
-                      <a:round/>
-                      <a:headEnd type="none" w="med" len="med"/>
-                      <a:tailEnd type="none" w="med" len="med"/>
-                    </a:lnR>
-                    <a:lnT w="12700" cap="flat" cmpd="sng" algn="ctr">
-                      <a:solidFill>
-                        <a:schemeClr val="bg1">
-                          <a:lumMod val="85000"/>
-                        </a:schemeClr>
-                      </a:solidFill>
-                      <a:prstDash val="solid"/>
-                      <a:round/>
-                      <a:headEnd type="none" w="med" len="med"/>
-                      <a:tailEnd type="none" w="med" len="med"/>
-                    </a:lnT>
-                    <a:lnB w="12700" cap="flat" cmpd="sng" algn="ctr">
-                      <a:solidFill>
-                        <a:schemeClr val="bg1">
-                          <a:lumMod val="85000"/>
-                        </a:schemeClr>
-                      </a:solidFill>
-                      <a:prstDash val="solid"/>
-                      <a:round/>
-                      <a:headEnd type="none" w="med" len="med"/>
-                      <a:tailEnd type="none" w="med" len="med"/>
-                    </a:lnB>
-                    <a:noFill/>
-                  </a:tcPr>
-                </a:tc>
-                <a:extLst>
-                  <a:ext uri="{0D108BD9-81ED-4DB2-BD59-A6C34878D82A}">
-                    <a16:rowId xmlns:a16="http://schemas.microsoft.com/office/drawing/2014/main" val="4293083417"/>
-                  </a:ext>
-                </a:extLst>
-              </a:tr>
-              <a:tr h="4543492">
-                <a:tc>
-                  <a:txBody>
-                    <a:bodyPr/>
-                    <a:lstStyle/>
-                    <a:p>
-                      <a:r>
-                        <a:rPr lang="ko-KR" altLang="en-US" sz="1400" b="0">
-                          <a:solidFill>
-                            <a:schemeClr val="tx1"/>
-                          </a:solidFill>
-                        </a:rPr>
-                        <a:t>#순례가이드미카엘</a:t>
-                      </a:r>
-                    </a:p>
-                  </a:txBody>
-                  <a:tcPr anchor="ctr">
-                    <a:lnL w="12700" cap="flat" cmpd="sng" algn="ctr">
-                      <a:solidFill>
-                        <a:schemeClr val="bg1">
-                          <a:lumMod val="85000"/>
-                        </a:schemeClr>
-                      </a:solidFill>
-                      <a:prstDash val="solid"/>
-                      <a:round/>
-                      <a:headEnd type="none" w="med" len="med"/>
-                      <a:tailEnd type="none" w="med" len="med"/>
-                    </a:lnL>
-                    <a:lnR w="12700" cap="flat" cmpd="sng" algn="ctr">
-                      <a:solidFill>
-                        <a:schemeClr val="bg1">
-                          <a:lumMod val="85000"/>
-                        </a:schemeClr>
-                      </a:solidFill>
-                      <a:prstDash val="solid"/>
-                      <a:round/>
-                      <a:headEnd type="none" w="med" len="med"/>
-                      <a:tailEnd type="none" w="med" len="med"/>
-                    </a:lnR>
-                    <a:lnT w="12700" cap="flat" cmpd="sng" algn="ctr">
-                      <a:solidFill>
-                        <a:schemeClr val="bg1">
-                          <a:lumMod val="85000"/>
-                        </a:schemeClr>
-                      </a:solidFill>
-                      <a:prstDash val="solid"/>
-                      <a:round/>
-                      <a:headEnd type="none" w="med" len="med"/>
-                      <a:tailEnd type="none" w="med" len="med"/>
-                    </a:lnT>
-                    <a:lnB w="12700" cap="flat" cmpd="sng" algn="ctr">
-                      <a:solidFill>
-                        <a:schemeClr val="bg1">
-                          <a:lumMod val="85000"/>
-                        </a:schemeClr>
-                      </a:solidFill>
-                      <a:prstDash val="solid"/>
-                      <a:round/>
-                      <a:headEnd type="none" w="med" len="med"/>
-                      <a:tailEnd type="none" w="med" len="med"/>
-                    </a:lnB>
-                    <a:noFill/>
-                  </a:tcPr>
-                </a:tc>
-                <a:tc>
-                  <a:txBody>
-                    <a:bodyPr/>
-                    <a:lstStyle/>
-                    <a:p>
-                      <a:r>
-                        <a:rPr lang="ko-KR" altLang="en-US" sz="1400" b="0">
-                          <a:solidFill>
-                            <a:schemeClr val="tx1"/>
-                          </a:solidFill>
-                        </a:rPr>
-                        <a:t>성지 DB 범위 제한 AI 챗봇</a:t>
-                      </a:r>
-                    </a:p>
-                  </a:txBody>
-                  <a:tcPr anchor="ctr">
-                    <a:lnL w="12700" cap="flat" cmpd="sng" algn="ctr">
-                      <a:solidFill>
-                        <a:schemeClr val="bg1">
-                          <a:lumMod val="85000"/>
-                        </a:schemeClr>
-                      </a:solidFill>
-                      <a:prstDash val="solid"/>
-                      <a:round/>
-                      <a:headEnd type="none" w="med" len="med"/>
-                      <a:tailEnd type="none" w="med" len="med"/>
-                    </a:lnL>
-                    <a:lnR w="12700" cap="flat" cmpd="sng" algn="ctr">
-                      <a:solidFill>
-                        <a:schemeClr val="bg1">
-                          <a:lumMod val="85000"/>
-                        </a:schemeClr>
-                      </a:solidFill>
-                      <a:prstDash val="solid"/>
-                      <a:round/>
-                      <a:headEnd type="none" w="med" len="med"/>
-                      <a:tailEnd type="none" w="med" len="med"/>
-                    </a:lnR>
-                    <a:lnT w="12700" cap="flat" cmpd="sng" algn="ctr">
-                      <a:solidFill>
-                        <a:schemeClr val="bg1">
-                          <a:lumMod val="85000"/>
-                        </a:schemeClr>
-                      </a:solidFill>
-                      <a:prstDash val="solid"/>
-                      <a:round/>
-                      <a:headEnd type="none" w="med" len="med"/>
-                      <a:tailEnd type="none" w="med" len="med"/>
-                    </a:lnT>
-                    <a:lnB w="12700" cap="flat" cmpd="sng" algn="ctr">
-                      <a:solidFill>
-                        <a:schemeClr val="bg1">
-                          <a:lumMod val="85000"/>
-                        </a:schemeClr>
-                      </a:solidFill>
-                      <a:prstDash val="solid"/>
-                      <a:round/>
-                      <a:headEnd type="none" w="med" len="med"/>
-                      <a:tailEnd type="none" w="med" len="med"/>
-                    </a:lnB>
-                    <a:noFill/>
-                  </a:tcPr>
-                </a:tc>
-                <a:tc>
-                  <a:txBody>
-                    <a:bodyPr/>
-                    <a:lstStyle/>
-                    <a:p>
-                      <a:r>
-                        <a:rPr lang="ko-KR" altLang="en-US" sz="1400" b="0">
-                          <a:solidFill>
-                            <a:schemeClr val="tx1"/>
-                          </a:solidFill>
-                        </a:rPr>
-                        <a:t>Gemini 기반 대화형 가이드가 질문과 관련된 성지 DB 레코드만 컨텍스트로 사용하며, 컨텍스트에 없는 내용은 "모른다"고 답해 종교 성지 정보의 오답을 막는다.</a:t>
                       </a:r>
                     </a:p>
                   </a:txBody>
